--- a/FdP-B 2026/Esercitazione 8/Es8.pptx
+++ b/FdP-B 2026/Esercitazione 8/Es8.pptx
@@ -5,7 +5,7 @@
     <p:sldMasterId id="2147483648" r:id="rId1"/>
   </p:sldMasterIdLst>
   <p:notesMasterIdLst>
-    <p:notesMasterId r:id="rId8"/>
+    <p:notesMasterId r:id="rId11"/>
   </p:notesMasterIdLst>
   <p:sldIdLst>
     <p:sldId id="265" r:id="rId2"/>
@@ -14,6 +14,9 @@
     <p:sldId id="276" r:id="rId5"/>
     <p:sldId id="277" r:id="rId6"/>
     <p:sldId id="278" r:id="rId7"/>
+    <p:sldId id="279" r:id="rId8"/>
+    <p:sldId id="281" r:id="rId9"/>
+    <p:sldId id="282" r:id="rId10"/>
   </p:sldIdLst>
   <p:sldSz cx="12192000" cy="6858000"/>
   <p:notesSz cx="6858000" cy="9144000"/>
@@ -120,23 +123,31 @@
 </p:presentation>
 </file>
 
+<file path=ppt/revisionInfo.xml><?xml version="1.0" encoding="utf-8"?>
+<p1510:revInfo xmlns:a="http://schemas.openxmlformats.org/drawingml/2006/main" xmlns:r="http://schemas.openxmlformats.org/officeDocument/2006/relationships" xmlns:p1510="http://schemas.microsoft.com/office/powerpoint/2015/10/main">
+  <p1510:revLst>
+    <p1510:client id="{D55316CC-40A8-4935-BE51-EE2A42D4CD7A}" v="1" dt="2026-05-06T12:38:13.377"/>
+  </p1510:revLst>
+</p1510:revInfo>
+</file>
+
 <file path=ppt/changesInfos/changesInfo1.xml><?xml version="1.0" encoding="utf-8"?>
 <pc:chgInfo xmlns:a="http://schemas.openxmlformats.org/drawingml/2006/main" xmlns:r="http://schemas.openxmlformats.org/officeDocument/2006/relationships" xmlns:ac="http://schemas.microsoft.com/office/drawing/2013/main/command" xmlns:pc="http://schemas.microsoft.com/office/powerpoint/2013/main/command">
   <pc:docChgLst>
     <pc:chgData name="Filippo Bianchi" userId="7ab6c9c88ca9f8fa" providerId="LiveId" clId="{A6F63C33-B3C5-434A-BE4D-42238D658A96}"/>
     <pc:docChg chg="undo redo custSel addSld delSld modSld sldOrd">
-      <pc:chgData name="Filippo Bianchi" userId="7ab6c9c88ca9f8fa" providerId="LiveId" clId="{A6F63C33-B3C5-434A-BE4D-42238D658A96}" dt="2026-05-05T16:36:48.693" v="10988" actId="20577"/>
+      <pc:chgData name="Filippo Bianchi" userId="7ab6c9c88ca9f8fa" providerId="LiveId" clId="{A6F63C33-B3C5-434A-BE4D-42238D658A96}" dt="2026-05-06T15:48:55.855" v="12388" actId="20577"/>
       <pc:docMkLst>
         <pc:docMk/>
       </pc:docMkLst>
       <pc:sldChg chg="modSp mod">
-        <pc:chgData name="Filippo Bianchi" userId="7ab6c9c88ca9f8fa" providerId="LiveId" clId="{A6F63C33-B3C5-434A-BE4D-42238D658A96}" dt="2026-04-28T14:49:52.181" v="7847" actId="20577"/>
+        <pc:chgData name="Filippo Bianchi" userId="7ab6c9c88ca9f8fa" providerId="LiveId" clId="{A6F63C33-B3C5-434A-BE4D-42238D658A96}" dt="2026-05-06T08:28:22.981" v="11913" actId="20577"/>
         <pc:sldMkLst>
           <pc:docMk/>
           <pc:sldMk cId="352072517" sldId="265"/>
         </pc:sldMkLst>
         <pc:spChg chg="mod">
-          <ac:chgData name="Filippo Bianchi" userId="7ab6c9c88ca9f8fa" providerId="LiveId" clId="{A6F63C33-B3C5-434A-BE4D-42238D658A96}" dt="2026-04-28T14:49:45.668" v="7843" actId="20577"/>
+          <ac:chgData name="Filippo Bianchi" userId="7ab6c9c88ca9f8fa" providerId="LiveId" clId="{A6F63C33-B3C5-434A-BE4D-42238D658A96}" dt="2026-05-06T08:28:17.013" v="11903" actId="20577"/>
           <ac:spMkLst>
             <pc:docMk/>
             <pc:sldMk cId="352072517" sldId="265"/>
@@ -144,7 +155,7 @@
           </ac:spMkLst>
         </pc:spChg>
         <pc:spChg chg="mod">
-          <ac:chgData name="Filippo Bianchi" userId="7ab6c9c88ca9f8fa" providerId="LiveId" clId="{A6F63C33-B3C5-434A-BE4D-42238D658A96}" dt="2026-04-28T14:49:52.181" v="7847" actId="20577"/>
+          <ac:chgData name="Filippo Bianchi" userId="7ab6c9c88ca9f8fa" providerId="LiveId" clId="{A6F63C33-B3C5-434A-BE4D-42238D658A96}" dt="2026-05-06T08:28:22.981" v="11913" actId="20577"/>
           <ac:spMkLst>
             <pc:docMk/>
             <pc:sldMk cId="352072517" sldId="265"/>
@@ -221,13 +232,13 @@
         </pc:sldMkLst>
       </pc:sldChg>
       <pc:sldChg chg="modSp add mod">
-        <pc:chgData name="Filippo Bianchi" userId="7ab6c9c88ca9f8fa" providerId="LiveId" clId="{A6F63C33-B3C5-434A-BE4D-42238D658A96}" dt="2026-05-05T16:33:51.969" v="10836" actId="20577"/>
+        <pc:chgData name="Filippo Bianchi" userId="7ab6c9c88ca9f8fa" providerId="LiveId" clId="{A6F63C33-B3C5-434A-BE4D-42238D658A96}" dt="2026-05-06T15:01:41.896" v="12222" actId="20577"/>
         <pc:sldMkLst>
           <pc:docMk/>
           <pc:sldMk cId="1763530209" sldId="276"/>
         </pc:sldMkLst>
         <pc:spChg chg="mod">
-          <ac:chgData name="Filippo Bianchi" userId="7ab6c9c88ca9f8fa" providerId="LiveId" clId="{A6F63C33-B3C5-434A-BE4D-42238D658A96}" dt="2026-05-05T16:31:21.330" v="10776" actId="20577"/>
+          <ac:chgData name="Filippo Bianchi" userId="7ab6c9c88ca9f8fa" providerId="LiveId" clId="{A6F63C33-B3C5-434A-BE4D-42238D658A96}" dt="2026-05-06T15:01:41.896" v="12222" actId="20577"/>
           <ac:spMkLst>
             <pc:docMk/>
             <pc:sldMk cId="1763530209" sldId="276"/>
@@ -252,13 +263,13 @@
         </pc:spChg>
       </pc:sldChg>
       <pc:sldChg chg="modSp add mod">
-        <pc:chgData name="Filippo Bianchi" userId="7ab6c9c88ca9f8fa" providerId="LiveId" clId="{A6F63C33-B3C5-434A-BE4D-42238D658A96}" dt="2026-05-05T16:35:18.150" v="10862" actId="20577"/>
+        <pc:chgData name="Filippo Bianchi" userId="7ab6c9c88ca9f8fa" providerId="LiveId" clId="{A6F63C33-B3C5-434A-BE4D-42238D658A96}" dt="2026-05-06T15:11:06.380" v="12370" actId="20577"/>
         <pc:sldMkLst>
           <pc:docMk/>
           <pc:sldMk cId="1280531235" sldId="277"/>
         </pc:sldMkLst>
         <pc:spChg chg="mod">
-          <ac:chgData name="Filippo Bianchi" userId="7ab6c9c88ca9f8fa" providerId="LiveId" clId="{A6F63C33-B3C5-434A-BE4D-42238D658A96}" dt="2026-05-05T16:35:18.150" v="10862" actId="20577"/>
+          <ac:chgData name="Filippo Bianchi" userId="7ab6c9c88ca9f8fa" providerId="LiveId" clId="{A6F63C33-B3C5-434A-BE4D-42238D658A96}" dt="2026-05-06T15:11:06.380" v="12370" actId="20577"/>
           <ac:spMkLst>
             <pc:docMk/>
             <pc:sldMk cId="1280531235" sldId="277"/>
@@ -327,6 +338,114 @@
           <pc:sldMk cId="2194580149" sldId="278"/>
         </pc:sldMkLst>
       </pc:sldChg>
+      <pc:sldChg chg="modSp add mod">
+        <pc:chgData name="Filippo Bianchi" userId="7ab6c9c88ca9f8fa" providerId="LiveId" clId="{A6F63C33-B3C5-434A-BE4D-42238D658A96}" dt="2026-05-05T17:36:52.060" v="11230" actId="20577"/>
+        <pc:sldMkLst>
+          <pc:docMk/>
+          <pc:sldMk cId="2181950911" sldId="279"/>
+        </pc:sldMkLst>
+        <pc:spChg chg="mod">
+          <ac:chgData name="Filippo Bianchi" userId="7ab6c9c88ca9f8fa" providerId="LiveId" clId="{A6F63C33-B3C5-434A-BE4D-42238D658A96}" dt="2026-05-05T17:36:52.060" v="11230" actId="20577"/>
+          <ac:spMkLst>
+            <pc:docMk/>
+            <pc:sldMk cId="2181950911" sldId="279"/>
+            <ac:spMk id="6" creationId="{637E8D33-F45A-2C26-6192-DC2D59C08736}"/>
+          </ac:spMkLst>
+        </pc:spChg>
+        <pc:spChg chg="mod">
+          <ac:chgData name="Filippo Bianchi" userId="7ab6c9c88ca9f8fa" providerId="LiveId" clId="{A6F63C33-B3C5-434A-BE4D-42238D658A96}" dt="2026-05-05T17:35:19.119" v="10999" actId="20577"/>
+          <ac:spMkLst>
+            <pc:docMk/>
+            <pc:sldMk cId="2181950911" sldId="279"/>
+            <ac:spMk id="7" creationId="{DA207E27-837E-DA7B-1D73-54769D7512E4}"/>
+          </ac:spMkLst>
+        </pc:spChg>
+        <pc:spChg chg="mod">
+          <ac:chgData name="Filippo Bianchi" userId="7ab6c9c88ca9f8fa" providerId="LiveId" clId="{A6F63C33-B3C5-434A-BE4D-42238D658A96}" dt="2026-05-05T17:35:14.883" v="10991" actId="20577"/>
+          <ac:spMkLst>
+            <pc:docMk/>
+            <pc:sldMk cId="2181950911" sldId="279"/>
+            <ac:spMk id="9" creationId="{273D043B-A5EC-20E5-00C1-B0A0A429AB17}"/>
+          </ac:spMkLst>
+        </pc:spChg>
+      </pc:sldChg>
+      <pc:sldChg chg="modSp add del mod">
+        <pc:chgData name="Filippo Bianchi" userId="7ab6c9c88ca9f8fa" providerId="LiveId" clId="{A6F63C33-B3C5-434A-BE4D-42238D658A96}" dt="2026-05-06T08:28:55.883" v="11914" actId="2696"/>
+        <pc:sldMkLst>
+          <pc:docMk/>
+          <pc:sldMk cId="4050581296" sldId="280"/>
+        </pc:sldMkLst>
+        <pc:spChg chg="mod">
+          <ac:chgData name="Filippo Bianchi" userId="7ab6c9c88ca9f8fa" providerId="LiveId" clId="{A6F63C33-B3C5-434A-BE4D-42238D658A96}" dt="2026-05-05T17:40:37.409" v="11813" actId="20577"/>
+          <ac:spMkLst>
+            <pc:docMk/>
+            <pc:sldMk cId="4050581296" sldId="280"/>
+            <ac:spMk id="6" creationId="{D28EC7B9-1697-D7F6-8975-A4A064DD2D73}"/>
+          </ac:spMkLst>
+        </pc:spChg>
+        <pc:spChg chg="mod">
+          <ac:chgData name="Filippo Bianchi" userId="7ab6c9c88ca9f8fa" providerId="LiveId" clId="{A6F63C33-B3C5-434A-BE4D-42238D658A96}" dt="2026-05-05T17:38:38.779" v="11461" actId="20577"/>
+          <ac:spMkLst>
+            <pc:docMk/>
+            <pc:sldMk cId="4050581296" sldId="280"/>
+            <ac:spMk id="7" creationId="{EF26DF63-614E-FECF-9CDB-F63D31CEFCC7}"/>
+          </ac:spMkLst>
+        </pc:spChg>
+      </pc:sldChg>
+      <pc:sldChg chg="modSp add mod">
+        <pc:chgData name="Filippo Bianchi" userId="7ab6c9c88ca9f8fa" providerId="LiveId" clId="{A6F63C33-B3C5-434A-BE4D-42238D658A96}" dt="2026-05-06T12:39:24.503" v="12128" actId="20577"/>
+        <pc:sldMkLst>
+          <pc:docMk/>
+          <pc:sldMk cId="2182501413" sldId="281"/>
+        </pc:sldMkLst>
+        <pc:spChg chg="mod">
+          <ac:chgData name="Filippo Bianchi" userId="7ab6c9c88ca9f8fa" providerId="LiveId" clId="{A6F63C33-B3C5-434A-BE4D-42238D658A96}" dt="2026-05-06T12:39:24.503" v="12128" actId="20577"/>
+          <ac:spMkLst>
+            <pc:docMk/>
+            <pc:sldMk cId="2182501413" sldId="281"/>
+            <ac:spMk id="6" creationId="{13092CD8-6C7B-B150-5302-C29A420B5185}"/>
+          </ac:spMkLst>
+        </pc:spChg>
+        <pc:spChg chg="mod">
+          <ac:chgData name="Filippo Bianchi" userId="7ab6c9c88ca9f8fa" providerId="LiveId" clId="{A6F63C33-B3C5-434A-BE4D-42238D658A96}" dt="2026-05-05T17:40:53.784" v="11817" actId="20577"/>
+          <ac:spMkLst>
+            <pc:docMk/>
+            <pc:sldMk cId="2182501413" sldId="281"/>
+            <ac:spMk id="7" creationId="{0667927C-BE27-F937-17D1-EE099623C4E1}"/>
+          </ac:spMkLst>
+        </pc:spChg>
+        <pc:spChg chg="mod">
+          <ac:chgData name="Filippo Bianchi" userId="7ab6c9c88ca9f8fa" providerId="LiveId" clId="{A6F63C33-B3C5-434A-BE4D-42238D658A96}" dt="2026-05-06T08:29:03.870" v="11916" actId="20577"/>
+          <ac:spMkLst>
+            <pc:docMk/>
+            <pc:sldMk cId="2182501413" sldId="281"/>
+            <ac:spMk id="9" creationId="{4F61A094-99B9-B1B3-DF3F-0888C53F5374}"/>
+          </ac:spMkLst>
+        </pc:spChg>
+      </pc:sldChg>
+      <pc:sldChg chg="modSp add mod">
+        <pc:chgData name="Filippo Bianchi" userId="7ab6c9c88ca9f8fa" providerId="LiveId" clId="{A6F63C33-B3C5-434A-BE4D-42238D658A96}" dt="2026-05-06T15:48:55.855" v="12388" actId="20577"/>
+        <pc:sldMkLst>
+          <pc:docMk/>
+          <pc:sldMk cId="247524872" sldId="282"/>
+        </pc:sldMkLst>
+        <pc:spChg chg="mod">
+          <ac:chgData name="Filippo Bianchi" userId="7ab6c9c88ca9f8fa" providerId="LiveId" clId="{A6F63C33-B3C5-434A-BE4D-42238D658A96}" dt="2026-05-06T15:48:55.855" v="12388" actId="20577"/>
+          <ac:spMkLst>
+            <pc:docMk/>
+            <pc:sldMk cId="247524872" sldId="282"/>
+            <ac:spMk id="6" creationId="{9084F79B-56AC-DB8F-675E-D31755F32CA6}"/>
+          </ac:spMkLst>
+        </pc:spChg>
+        <pc:spChg chg="mod">
+          <ac:chgData name="Filippo Bianchi" userId="7ab6c9c88ca9f8fa" providerId="LiveId" clId="{A6F63C33-B3C5-434A-BE4D-42238D658A96}" dt="2026-05-06T12:38:25.698" v="11927" actId="20577"/>
+          <ac:spMkLst>
+            <pc:docMk/>
+            <pc:sldMk cId="247524872" sldId="282"/>
+            <ac:spMk id="9" creationId="{F0B1A91C-94A3-065C-16EA-5E6A6B4F1382}"/>
+          </ac:spMkLst>
+        </pc:spChg>
+      </pc:sldChg>
     </pc:docChg>
   </pc:docChgLst>
 </pc:chgInfo>
@@ -414,7 +533,7 @@
           <a:p>
             <a:fld id="{1787FD94-0997-4C93-A6CE-A4FCB29B8830}" type="datetimeFigureOut">
               <a:rPr lang="it-IT" smtClean="0"/>
-              <a:t>05/05/2026</a:t>
+              <a:t>06/05/2026</a:t>
             </a:fld>
             <a:endParaRPr lang="it-IT"/>
           </a:p>
@@ -828,7 +947,7 @@
           <a:p>
             <a:fld id="{97D53689-04E0-4C33-BFEA-E58E3C916FA8}" type="datetime1">
               <a:rPr lang="it-IT" smtClean="0"/>
-              <a:t>05/05/2026</a:t>
+              <a:t>06/05/2026</a:t>
             </a:fld>
             <a:endParaRPr lang="it-IT"/>
           </a:p>
@@ -1026,7 +1145,7 @@
           <a:p>
             <a:fld id="{82AE1921-5445-4359-8CB1-FB6456A8095F}" type="datetime1">
               <a:rPr lang="it-IT" smtClean="0"/>
-              <a:t>05/05/2026</a:t>
+              <a:t>06/05/2026</a:t>
             </a:fld>
             <a:endParaRPr lang="it-IT"/>
           </a:p>
@@ -1234,7 +1353,7 @@
           <a:p>
             <a:fld id="{A1BE373F-D2F5-45D1-81D5-E3F87BBD24F1}" type="datetime1">
               <a:rPr lang="it-IT" smtClean="0"/>
-              <a:t>05/05/2026</a:t>
+              <a:t>06/05/2026</a:t>
             </a:fld>
             <a:endParaRPr lang="it-IT"/>
           </a:p>
@@ -1432,7 +1551,7 @@
           <a:p>
             <a:fld id="{E2980A62-FF50-42B4-ABD4-66BDF0377124}" type="datetime1">
               <a:rPr lang="it-IT" smtClean="0"/>
-              <a:t>05/05/2026</a:t>
+              <a:t>06/05/2026</a:t>
             </a:fld>
             <a:endParaRPr lang="it-IT"/>
           </a:p>
@@ -1707,7 +1826,7 @@
           <a:p>
             <a:fld id="{4E34BA82-4808-4936-8CB6-EF20EA68B75D}" type="datetime1">
               <a:rPr lang="it-IT" smtClean="0"/>
-              <a:t>05/05/2026</a:t>
+              <a:t>06/05/2026</a:t>
             </a:fld>
             <a:endParaRPr lang="it-IT"/>
           </a:p>
@@ -1972,7 +2091,7 @@
           <a:p>
             <a:fld id="{9D077773-62F9-4EA2-B9DB-D166AA387877}" type="datetime1">
               <a:rPr lang="it-IT" smtClean="0"/>
-              <a:t>05/05/2026</a:t>
+              <a:t>06/05/2026</a:t>
             </a:fld>
             <a:endParaRPr lang="it-IT"/>
           </a:p>
@@ -2384,7 +2503,7 @@
           <a:p>
             <a:fld id="{3C86202F-617E-4E96-8B77-B1CAF6769140}" type="datetime1">
               <a:rPr lang="it-IT" smtClean="0"/>
-              <a:t>05/05/2026</a:t>
+              <a:t>06/05/2026</a:t>
             </a:fld>
             <a:endParaRPr lang="it-IT"/>
           </a:p>
@@ -2525,7 +2644,7 @@
           <a:p>
             <a:fld id="{AC8FFC50-70EB-4FBA-B8C6-7E8EB646E9C4}" type="datetime1">
               <a:rPr lang="it-IT" smtClean="0"/>
-              <a:t>05/05/2026</a:t>
+              <a:t>06/05/2026</a:t>
             </a:fld>
             <a:endParaRPr lang="it-IT"/>
           </a:p>
@@ -2638,7 +2757,7 @@
           <a:p>
             <a:fld id="{087771AD-94E2-4929-BF21-F8B592FAD9D9}" type="datetime1">
               <a:rPr lang="it-IT" smtClean="0"/>
-              <a:t>05/05/2026</a:t>
+              <a:t>06/05/2026</a:t>
             </a:fld>
             <a:endParaRPr lang="it-IT"/>
           </a:p>
@@ -2949,7 +3068,7 @@
           <a:p>
             <a:fld id="{A92E6745-80CD-4BCD-A988-4DD72207293A}" type="datetime1">
               <a:rPr lang="it-IT" smtClean="0"/>
-              <a:t>05/05/2026</a:t>
+              <a:t>06/05/2026</a:t>
             </a:fld>
             <a:endParaRPr lang="it-IT"/>
           </a:p>
@@ -3237,7 +3356,7 @@
           <a:p>
             <a:fld id="{B5E7F64A-0508-4C12-BEEE-45E8F03CD325}" type="datetime1">
               <a:rPr lang="it-IT" smtClean="0"/>
-              <a:t>05/05/2026</a:t>
+              <a:t>06/05/2026</a:t>
             </a:fld>
             <a:endParaRPr lang="it-IT"/>
           </a:p>
@@ -3478,7 +3597,7 @@
           <a:p>
             <a:fld id="{71927F83-19ED-45B1-8786-F31B2BFCCE8E}" type="datetime1">
               <a:rPr lang="it-IT" smtClean="0"/>
-              <a:t>05/05/2026</a:t>
+              <a:t>06/05/2026</a:t>
             </a:fld>
             <a:endParaRPr lang="it-IT"/>
           </a:p>
@@ -3932,7 +4051,7 @@
                 <a:latin typeface="Cambria" panose="02040503050406030204" pitchFamily="18" charset="0"/>
                 <a:ea typeface="Cambria" panose="02040503050406030204" pitchFamily="18" charset="0"/>
               </a:rPr>
-              <a:t>Esercitazione 7</a:t>
+              <a:t>Esercitazione 8</a:t>
             </a:r>
           </a:p>
         </p:txBody>
@@ -4183,18 +4302,11 @@
           <a:lstStyle/>
           <a:p>
             <a:r>
-              <a:rPr lang="it-IT" b="1" u="sng" dirty="0">
-                <a:latin typeface="Cambria" panose="02040503050406030204" pitchFamily="18" charset="0"/>
-                <a:ea typeface="Cambria" panose="02040503050406030204" pitchFamily="18" charset="0"/>
-              </a:rPr>
-              <a:t>29</a:t>
-            </a:r>
-            <a:r>
               <a:rPr lang="it-IT" b="1" u="sng" noProof="0" dirty="0">
                 <a:latin typeface="Cambria" panose="02040503050406030204" pitchFamily="18" charset="0"/>
                 <a:ea typeface="Cambria" panose="02040503050406030204" pitchFamily="18" charset="0"/>
               </a:rPr>
-              <a:t>/04/2026</a:t>
+              <a:t>06/05/2026</a:t>
             </a:r>
           </a:p>
         </p:txBody>
@@ -5979,7 +6091,21 @@
                 <a:latin typeface="Cambria" panose="02040503050406030204" pitchFamily="18" charset="0"/>
                 <a:ea typeface="Cambria" panose="02040503050406030204" pitchFamily="18" charset="0"/>
               </a:rPr>
-              <a:t> (in modo che ritorni una stringa formattata contenente gli attributi)</a:t>
+              <a:t> (in modo che ritorni una stringa formattata contenente gli attributi) e </a:t>
+            </a:r>
+            <a:r>
+              <a:rPr lang="it-IT" dirty="0" err="1">
+                <a:latin typeface="Cambria" panose="02040503050406030204" pitchFamily="18" charset="0"/>
+                <a:ea typeface="Cambria" panose="02040503050406030204" pitchFamily="18" charset="0"/>
+              </a:rPr>
+              <a:t>equals</a:t>
+            </a:r>
+            <a:r>
+              <a:rPr lang="it-IT" dirty="0">
+                <a:latin typeface="Cambria" panose="02040503050406030204" pitchFamily="18" charset="0"/>
+                <a:ea typeface="Cambria" panose="02040503050406030204" pitchFamily="18" charset="0"/>
+              </a:rPr>
+              <a:t> (due libri sono uguali se hanno lo stesso autore e stesso codice identificativo)</a:t>
             </a:r>
           </a:p>
         </p:txBody>
@@ -6606,7 +6732,21 @@
                 <a:latin typeface="Cambria" panose="02040503050406030204" pitchFamily="18" charset="0"/>
                 <a:ea typeface="Cambria" panose="02040503050406030204" pitchFamily="18" charset="0"/>
               </a:rPr>
-              <a:t> (in modo che ritorni una stringa formattata contenente gli attributi)</a:t>
+              <a:t> (in modo che ritorni una stringa formattata contenente gli attributi) e </a:t>
+            </a:r>
+            <a:r>
+              <a:rPr lang="it-IT" dirty="0" err="1">
+                <a:latin typeface="Cambria" panose="02040503050406030204" pitchFamily="18" charset="0"/>
+                <a:ea typeface="Cambria" panose="02040503050406030204" pitchFamily="18" charset="0"/>
+              </a:rPr>
+              <a:t>equals</a:t>
+            </a:r>
+            <a:r>
+              <a:rPr lang="it-IT" dirty="0">
+                <a:latin typeface="Cambria" panose="02040503050406030204" pitchFamily="18" charset="0"/>
+                <a:ea typeface="Cambria" panose="02040503050406030204" pitchFamily="18" charset="0"/>
+              </a:rPr>
+              <a:t> (due riviste sono uguali se sono uscite lo stesso messe dello stesso anno e hanno lo stesso codice identificativo)</a:t>
             </a:r>
           </a:p>
         </p:txBody>
@@ -7226,26 +7366,1906 @@
                 <a:latin typeface="Cambria" panose="02040503050406030204" pitchFamily="18" charset="0"/>
                 <a:ea typeface="Cambria" panose="02040503050406030204" pitchFamily="18" charset="0"/>
               </a:rPr>
-              <a:t> (due Utenti sono uguali </a:t>
-            </a:r>
-            <a:r>
-              <a:rPr lang="it-IT">
-                <a:latin typeface="Cambria" panose="02040503050406030204" pitchFamily="18" charset="0"/>
-                <a:ea typeface="Cambria" panose="02040503050406030204" pitchFamily="18" charset="0"/>
-              </a:rPr>
-              <a:t>se hanno lo stesso id)</a:t>
-            </a:r>
+              <a:t> (due Utenti sono uguali se hanno lo stesso id)</a:t>
+            </a:r>
+          </a:p>
+        </p:txBody>
+      </p:sp>
+    </p:spTree>
+    <p:extLst>
+      <p:ext uri="{BB962C8B-B14F-4D97-AF65-F5344CB8AC3E}">
+        <p14:creationId xmlns:p14="http://schemas.microsoft.com/office/powerpoint/2010/main" val="298291907"/>
+      </p:ext>
+    </p:extLst>
+  </p:cSld>
+  <p:clrMapOvr>
+    <a:masterClrMapping/>
+  </p:clrMapOvr>
+</p:sld>
+</file>
+
+<file path=ppt/slides/slide7.xml><?xml version="1.0" encoding="utf-8"?>
+<p:sld xmlns:a="http://schemas.openxmlformats.org/drawingml/2006/main" xmlns:r="http://schemas.openxmlformats.org/officeDocument/2006/relationships" xmlns:p="http://schemas.openxmlformats.org/presentationml/2006/main">
+  <p:cSld>
+    <p:spTree>
+      <p:nvGrpSpPr>
+        <p:cNvPr id="1" name="">
+          <a:extLst>
+            <a:ext uri="{FF2B5EF4-FFF2-40B4-BE49-F238E27FC236}">
+              <a16:creationId xmlns:a16="http://schemas.microsoft.com/office/drawing/2014/main" id="{15CEDB49-514B-A85C-D46E-F5CF14286388}"/>
+            </a:ext>
+          </a:extLst>
+        </p:cNvPr>
+        <p:cNvGrpSpPr/>
+        <p:nvPr/>
+      </p:nvGrpSpPr>
+      <p:grpSpPr>
+        <a:xfrm>
+          <a:off x="0" y="0"/>
+          <a:ext cx="0" cy="0"/>
+          <a:chOff x="0" y="0"/>
+          <a:chExt cx="0" cy="0"/>
+        </a:xfrm>
+      </p:grpSpPr>
+      <p:sp>
+        <p:nvSpPr>
+          <p:cNvPr id="4" name="Segnaposto numero diapositiva 3">
+            <a:extLst>
+              <a:ext uri="{FF2B5EF4-FFF2-40B4-BE49-F238E27FC236}">
+                <a16:creationId xmlns:a16="http://schemas.microsoft.com/office/drawing/2014/main" id="{0C004B04-61D6-B51B-C6E1-5681EE6E5D68}"/>
+              </a:ext>
+            </a:extLst>
+          </p:cNvPr>
+          <p:cNvSpPr>
+            <a:spLocks noGrp="1"/>
+          </p:cNvSpPr>
+          <p:nvPr>
+            <p:ph type="sldNum" sz="quarter" idx="12"/>
+          </p:nvPr>
+        </p:nvSpPr>
+        <p:spPr/>
+        <p:txBody>
+          <a:bodyPr/>
+          <a:lstStyle/>
+          <a:p>
+            <a:fld id="{B07BBA08-9429-4EA8-9637-B9613057FD71}" type="slidenum">
+              <a:rPr lang="it-IT" noProof="0" smtClean="0"/>
+              <a:t>7</a:t>
+            </a:fld>
+            <a:endParaRPr lang="it-IT" noProof="0" dirty="0"/>
+          </a:p>
+        </p:txBody>
+      </p:sp>
+      <p:sp>
+        <p:nvSpPr>
+          <p:cNvPr id="7" name="Titolo 1">
+            <a:extLst>
+              <a:ext uri="{FF2B5EF4-FFF2-40B4-BE49-F238E27FC236}">
+                <a16:creationId xmlns:a16="http://schemas.microsoft.com/office/drawing/2014/main" id="{DA207E27-837E-DA7B-1D73-54769D7512E4}"/>
+              </a:ext>
+            </a:extLst>
+          </p:cNvPr>
+          <p:cNvSpPr txBox="1">
+            <a:spLocks/>
+          </p:cNvSpPr>
+          <p:nvPr/>
+        </p:nvSpPr>
+        <p:spPr>
+          <a:xfrm>
+            <a:off x="838200" y="223976"/>
+            <a:ext cx="10515600" cy="776341"/>
+          </a:xfrm>
+          <a:prstGeom prst="rect">
+            <a:avLst/>
+          </a:prstGeom>
+        </p:spPr>
+        <p:txBody>
+          <a:bodyPr vert="horz" lIns="91440" tIns="45720" rIns="91440" bIns="45720" rtlCol="0" anchor="ctr">
+            <a:normAutofit/>
+          </a:bodyPr>
+          <a:lstStyle>
+            <a:lvl1pPr algn="l" defTabSz="914400" rtl="0" eaLnBrk="1" latinLnBrk="0" hangingPunct="1">
+              <a:lnSpc>
+                <a:spcPct val="90000"/>
+              </a:lnSpc>
+              <a:spcBef>
+                <a:spcPct val="0"/>
+              </a:spcBef>
+              <a:buNone/>
+              <a:defRPr sz="4400" kern="1200">
+                <a:solidFill>
+                  <a:schemeClr val="tx1"/>
+                </a:solidFill>
+                <a:latin typeface="+mj-lt"/>
+                <a:ea typeface="+mj-ea"/>
+                <a:cs typeface="+mj-cs"/>
+              </a:defRPr>
+            </a:lvl1pPr>
+          </a:lstStyle>
+          <a:p>
+            <a:pPr algn="ctr"/>
+            <a:r>
+              <a:rPr lang="it-IT" b="1" noProof="0" dirty="0">
+                <a:latin typeface="Cambria" panose="02040503050406030204" pitchFamily="18" charset="0"/>
+                <a:ea typeface="Cambria" panose="02040503050406030204" pitchFamily="18" charset="0"/>
+              </a:rPr>
+              <a:t>Classe </a:t>
+            </a:r>
+            <a:r>
+              <a:rPr lang="it-IT" b="1" dirty="0">
+                <a:latin typeface="Cambria" panose="02040503050406030204" pitchFamily="18" charset="0"/>
+                <a:ea typeface="Cambria" panose="02040503050406030204" pitchFamily="18" charset="0"/>
+              </a:rPr>
+              <a:t>Prestito</a:t>
+            </a:r>
+            <a:r>
+              <a:rPr lang="it-IT" b="1" noProof="0" dirty="0">
+                <a:latin typeface="Cambria" panose="02040503050406030204" pitchFamily="18" charset="0"/>
+                <a:ea typeface="Cambria" panose="02040503050406030204" pitchFamily="18" charset="0"/>
+              </a:rPr>
+              <a:t> </a:t>
+            </a:r>
+          </a:p>
+        </p:txBody>
+      </p:sp>
+      <p:sp>
+        <p:nvSpPr>
+          <p:cNvPr id="8" name="Rettangolo 7">
+            <a:extLst>
+              <a:ext uri="{FF2B5EF4-FFF2-40B4-BE49-F238E27FC236}">
+                <a16:creationId xmlns:a16="http://schemas.microsoft.com/office/drawing/2014/main" id="{B3303E69-E20A-068C-2252-7474858A6736}"/>
+              </a:ext>
+            </a:extLst>
+          </p:cNvPr>
+          <p:cNvSpPr/>
+          <p:nvPr/>
+        </p:nvSpPr>
+        <p:spPr>
+          <a:xfrm>
+            <a:off x="0" y="6413074"/>
+            <a:ext cx="12192000" cy="444926"/>
+          </a:xfrm>
+          <a:prstGeom prst="rect">
+            <a:avLst/>
+          </a:prstGeom>
+          <a:solidFill>
+            <a:srgbClr val="1B69B0"/>
+          </a:solidFill>
+          <a:ln>
+            <a:solidFill>
+              <a:srgbClr val="1B69B0"/>
+            </a:solidFill>
+          </a:ln>
+        </p:spPr>
+        <p:style>
+          <a:lnRef idx="2">
+            <a:schemeClr val="accent1">
+              <a:shade val="15000"/>
+            </a:schemeClr>
+          </a:lnRef>
+          <a:fillRef idx="1">
+            <a:schemeClr val="accent1"/>
+          </a:fillRef>
+          <a:effectRef idx="0">
+            <a:schemeClr val="accent1"/>
+          </a:effectRef>
+          <a:fontRef idx="minor">
+            <a:schemeClr val="lt1"/>
+          </a:fontRef>
+        </p:style>
+        <p:txBody>
+          <a:bodyPr rtlCol="0" anchor="ctr"/>
+          <a:lstStyle/>
+          <a:p>
+            <a:pPr algn="ctr"/>
+            <a:endParaRPr lang="it-IT" noProof="0" dirty="0"/>
+          </a:p>
+        </p:txBody>
+      </p:sp>
+      <p:sp>
+        <p:nvSpPr>
+          <p:cNvPr id="9" name="Segnaposto numero diapositiva 9">
+            <a:extLst>
+              <a:ext uri="{FF2B5EF4-FFF2-40B4-BE49-F238E27FC236}">
+                <a16:creationId xmlns:a16="http://schemas.microsoft.com/office/drawing/2014/main" id="{273D043B-A5EC-20E5-00C1-B0A0A429AB17}"/>
+              </a:ext>
+            </a:extLst>
+          </p:cNvPr>
+          <p:cNvSpPr txBox="1">
+            <a:spLocks/>
+          </p:cNvSpPr>
+          <p:nvPr/>
+        </p:nvSpPr>
+        <p:spPr>
+          <a:xfrm>
+            <a:off x="5930303" y="6451461"/>
+            <a:ext cx="331394" cy="365125"/>
+          </a:xfrm>
+          <a:prstGeom prst="rect">
+            <a:avLst/>
+          </a:prstGeom>
+        </p:spPr>
+        <p:txBody>
+          <a:bodyPr vert="horz" lIns="91440" tIns="45720" rIns="91440" bIns="45720" rtlCol="0" anchor="ctr"/>
+          <a:lstStyle>
+            <a:defPPr>
+              <a:defRPr lang="it-IT"/>
+            </a:defPPr>
+            <a:lvl1pPr marL="0" algn="r" defTabSz="914400" rtl="0" eaLnBrk="1" latinLnBrk="0" hangingPunct="1">
+              <a:defRPr sz="1200" kern="1200">
+                <a:solidFill>
+                  <a:schemeClr val="tx1">
+                    <a:tint val="82000"/>
+                  </a:schemeClr>
+                </a:solidFill>
+                <a:latin typeface="+mn-lt"/>
+                <a:ea typeface="+mn-ea"/>
+                <a:cs typeface="+mn-cs"/>
+              </a:defRPr>
+            </a:lvl1pPr>
+            <a:lvl2pPr marL="457200" algn="l" defTabSz="914400" rtl="0" eaLnBrk="1" latinLnBrk="0" hangingPunct="1">
+              <a:defRPr sz="1800" kern="1200">
+                <a:solidFill>
+                  <a:schemeClr val="tx1"/>
+                </a:solidFill>
+                <a:latin typeface="+mn-lt"/>
+                <a:ea typeface="+mn-ea"/>
+                <a:cs typeface="+mn-cs"/>
+              </a:defRPr>
+            </a:lvl2pPr>
+            <a:lvl3pPr marL="914400" algn="l" defTabSz="914400" rtl="0" eaLnBrk="1" latinLnBrk="0" hangingPunct="1">
+              <a:defRPr sz="1800" kern="1200">
+                <a:solidFill>
+                  <a:schemeClr val="tx1"/>
+                </a:solidFill>
+                <a:latin typeface="+mn-lt"/>
+                <a:ea typeface="+mn-ea"/>
+                <a:cs typeface="+mn-cs"/>
+              </a:defRPr>
+            </a:lvl3pPr>
+            <a:lvl4pPr marL="1371600" algn="l" defTabSz="914400" rtl="0" eaLnBrk="1" latinLnBrk="0" hangingPunct="1">
+              <a:defRPr sz="1800" kern="1200">
+                <a:solidFill>
+                  <a:schemeClr val="tx1"/>
+                </a:solidFill>
+                <a:latin typeface="+mn-lt"/>
+                <a:ea typeface="+mn-ea"/>
+                <a:cs typeface="+mn-cs"/>
+              </a:defRPr>
+            </a:lvl4pPr>
+            <a:lvl5pPr marL="1828800" algn="l" defTabSz="914400" rtl="0" eaLnBrk="1" latinLnBrk="0" hangingPunct="1">
+              <a:defRPr sz="1800" kern="1200">
+                <a:solidFill>
+                  <a:schemeClr val="tx1"/>
+                </a:solidFill>
+                <a:latin typeface="+mn-lt"/>
+                <a:ea typeface="+mn-ea"/>
+                <a:cs typeface="+mn-cs"/>
+              </a:defRPr>
+            </a:lvl5pPr>
+            <a:lvl6pPr marL="2286000" algn="l" defTabSz="914400" rtl="0" eaLnBrk="1" latinLnBrk="0" hangingPunct="1">
+              <a:defRPr sz="1800" kern="1200">
+                <a:solidFill>
+                  <a:schemeClr val="tx1"/>
+                </a:solidFill>
+                <a:latin typeface="+mn-lt"/>
+                <a:ea typeface="+mn-ea"/>
+                <a:cs typeface="+mn-cs"/>
+              </a:defRPr>
+            </a:lvl6pPr>
+            <a:lvl7pPr marL="2743200" algn="l" defTabSz="914400" rtl="0" eaLnBrk="1" latinLnBrk="0" hangingPunct="1">
+              <a:defRPr sz="1800" kern="1200">
+                <a:solidFill>
+                  <a:schemeClr val="tx1"/>
+                </a:solidFill>
+                <a:latin typeface="+mn-lt"/>
+                <a:ea typeface="+mn-ea"/>
+                <a:cs typeface="+mn-cs"/>
+              </a:defRPr>
+            </a:lvl7pPr>
+            <a:lvl8pPr marL="3200400" algn="l" defTabSz="914400" rtl="0" eaLnBrk="1" latinLnBrk="0" hangingPunct="1">
+              <a:defRPr sz="1800" kern="1200">
+                <a:solidFill>
+                  <a:schemeClr val="tx1"/>
+                </a:solidFill>
+                <a:latin typeface="+mn-lt"/>
+                <a:ea typeface="+mn-ea"/>
+                <a:cs typeface="+mn-cs"/>
+              </a:defRPr>
+            </a:lvl8pPr>
+            <a:lvl9pPr marL="3657600" algn="l" defTabSz="914400" rtl="0" eaLnBrk="1" latinLnBrk="0" hangingPunct="1">
+              <a:defRPr sz="1800" kern="1200">
+                <a:solidFill>
+                  <a:schemeClr val="tx1"/>
+                </a:solidFill>
+                <a:latin typeface="+mn-lt"/>
+                <a:ea typeface="+mn-ea"/>
+                <a:cs typeface="+mn-cs"/>
+              </a:defRPr>
+            </a:lvl9pPr>
+          </a:lstStyle>
+          <a:p>
+            <a:pPr algn="ctr"/>
+            <a:r>
+              <a:rPr lang="it-IT" sz="1800" b="1" noProof="0" dirty="0">
+                <a:solidFill>
+                  <a:schemeClr val="bg1"/>
+                </a:solidFill>
+                <a:latin typeface="Cambria" panose="02040503050406030204" pitchFamily="18" charset="0"/>
+                <a:ea typeface="Cambria" panose="02040503050406030204" pitchFamily="18" charset="0"/>
+              </a:rPr>
+              <a:t>7</a:t>
+            </a:r>
+          </a:p>
+        </p:txBody>
+      </p:sp>
+      <p:sp>
+        <p:nvSpPr>
+          <p:cNvPr id="6" name="Segnaposto contenuto 2">
+            <a:extLst>
+              <a:ext uri="{FF2B5EF4-FFF2-40B4-BE49-F238E27FC236}">
+                <a16:creationId xmlns:a16="http://schemas.microsoft.com/office/drawing/2014/main" id="{637E8D33-F45A-2C26-6192-DC2D59C08736}"/>
+              </a:ext>
+            </a:extLst>
+          </p:cNvPr>
+          <p:cNvSpPr txBox="1">
+            <a:spLocks/>
+          </p:cNvSpPr>
+          <p:nvPr/>
+        </p:nvSpPr>
+        <p:spPr>
+          <a:xfrm>
+            <a:off x="838200" y="1515818"/>
+            <a:ext cx="10515600" cy="4559780"/>
+          </a:xfrm>
+          <a:prstGeom prst="rect">
+            <a:avLst/>
+          </a:prstGeom>
+        </p:spPr>
+        <p:txBody>
+          <a:bodyPr vert="horz" lIns="91440" tIns="45720" rIns="91440" bIns="45720" rtlCol="0">
+            <a:normAutofit/>
+          </a:bodyPr>
+          <a:lstStyle>
+            <a:lvl1pPr marL="228600" indent="-228600" algn="l" defTabSz="914400" rtl="0" eaLnBrk="1" latinLnBrk="0" hangingPunct="1">
+              <a:lnSpc>
+                <a:spcPct val="90000"/>
+              </a:lnSpc>
+              <a:spcBef>
+                <a:spcPts val="1000"/>
+              </a:spcBef>
+              <a:buFont typeface="Arial" panose="020B0604020202020204" pitchFamily="34" charset="0"/>
+              <a:buChar char="•"/>
+              <a:defRPr sz="2800" kern="1200">
+                <a:solidFill>
+                  <a:schemeClr val="tx1"/>
+                </a:solidFill>
+                <a:latin typeface="+mn-lt"/>
+                <a:ea typeface="+mn-ea"/>
+                <a:cs typeface="+mn-cs"/>
+              </a:defRPr>
+            </a:lvl1pPr>
+            <a:lvl2pPr marL="685800" indent="-228600" algn="l" defTabSz="914400" rtl="0" eaLnBrk="1" latinLnBrk="0" hangingPunct="1">
+              <a:lnSpc>
+                <a:spcPct val="90000"/>
+              </a:lnSpc>
+              <a:spcBef>
+                <a:spcPts val="500"/>
+              </a:spcBef>
+              <a:buFont typeface="Arial" panose="020B0604020202020204" pitchFamily="34" charset="0"/>
+              <a:buChar char="•"/>
+              <a:defRPr sz="2400" kern="1200">
+                <a:solidFill>
+                  <a:schemeClr val="tx1"/>
+                </a:solidFill>
+                <a:latin typeface="+mn-lt"/>
+                <a:ea typeface="+mn-ea"/>
+                <a:cs typeface="+mn-cs"/>
+              </a:defRPr>
+            </a:lvl2pPr>
+            <a:lvl3pPr marL="1143000" indent="-228600" algn="l" defTabSz="914400" rtl="0" eaLnBrk="1" latinLnBrk="0" hangingPunct="1">
+              <a:lnSpc>
+                <a:spcPct val="90000"/>
+              </a:lnSpc>
+              <a:spcBef>
+                <a:spcPts val="500"/>
+              </a:spcBef>
+              <a:buFont typeface="Arial" panose="020B0604020202020204" pitchFamily="34" charset="0"/>
+              <a:buChar char="•"/>
+              <a:defRPr sz="2000" kern="1200">
+                <a:solidFill>
+                  <a:schemeClr val="tx1"/>
+                </a:solidFill>
+                <a:latin typeface="+mn-lt"/>
+                <a:ea typeface="+mn-ea"/>
+                <a:cs typeface="+mn-cs"/>
+              </a:defRPr>
+            </a:lvl3pPr>
+            <a:lvl4pPr marL="1600200" indent="-228600" algn="l" defTabSz="914400" rtl="0" eaLnBrk="1" latinLnBrk="0" hangingPunct="1">
+              <a:lnSpc>
+                <a:spcPct val="90000"/>
+              </a:lnSpc>
+              <a:spcBef>
+                <a:spcPts val="500"/>
+              </a:spcBef>
+              <a:buFont typeface="Arial" panose="020B0604020202020204" pitchFamily="34" charset="0"/>
+              <a:buChar char="•"/>
+              <a:defRPr sz="1800" kern="1200">
+                <a:solidFill>
+                  <a:schemeClr val="tx1"/>
+                </a:solidFill>
+                <a:latin typeface="+mn-lt"/>
+                <a:ea typeface="+mn-ea"/>
+                <a:cs typeface="+mn-cs"/>
+              </a:defRPr>
+            </a:lvl4pPr>
+            <a:lvl5pPr marL="2057400" indent="-228600" algn="l" defTabSz="914400" rtl="0" eaLnBrk="1" latinLnBrk="0" hangingPunct="1">
+              <a:lnSpc>
+                <a:spcPct val="90000"/>
+              </a:lnSpc>
+              <a:spcBef>
+                <a:spcPts val="500"/>
+              </a:spcBef>
+              <a:buFont typeface="Arial" panose="020B0604020202020204" pitchFamily="34" charset="0"/>
+              <a:buChar char="•"/>
+              <a:defRPr sz="1800" kern="1200">
+                <a:solidFill>
+                  <a:schemeClr val="tx1"/>
+                </a:solidFill>
+                <a:latin typeface="+mn-lt"/>
+                <a:ea typeface="+mn-ea"/>
+                <a:cs typeface="+mn-cs"/>
+              </a:defRPr>
+            </a:lvl5pPr>
+            <a:lvl6pPr marL="2514600" indent="-228600" algn="l" defTabSz="914400" rtl="0" eaLnBrk="1" latinLnBrk="0" hangingPunct="1">
+              <a:lnSpc>
+                <a:spcPct val="90000"/>
+              </a:lnSpc>
+              <a:spcBef>
+                <a:spcPts val="500"/>
+              </a:spcBef>
+              <a:buFont typeface="Arial" panose="020B0604020202020204" pitchFamily="34" charset="0"/>
+              <a:buChar char="•"/>
+              <a:defRPr sz="1800" kern="1200">
+                <a:solidFill>
+                  <a:schemeClr val="tx1"/>
+                </a:solidFill>
+                <a:latin typeface="+mn-lt"/>
+                <a:ea typeface="+mn-ea"/>
+                <a:cs typeface="+mn-cs"/>
+              </a:defRPr>
+            </a:lvl6pPr>
+            <a:lvl7pPr marL="2971800" indent="-228600" algn="l" defTabSz="914400" rtl="0" eaLnBrk="1" latinLnBrk="0" hangingPunct="1">
+              <a:lnSpc>
+                <a:spcPct val="90000"/>
+              </a:lnSpc>
+              <a:spcBef>
+                <a:spcPts val="500"/>
+              </a:spcBef>
+              <a:buFont typeface="Arial" panose="020B0604020202020204" pitchFamily="34" charset="0"/>
+              <a:buChar char="•"/>
+              <a:defRPr sz="1800" kern="1200">
+                <a:solidFill>
+                  <a:schemeClr val="tx1"/>
+                </a:solidFill>
+                <a:latin typeface="+mn-lt"/>
+                <a:ea typeface="+mn-ea"/>
+                <a:cs typeface="+mn-cs"/>
+              </a:defRPr>
+            </a:lvl7pPr>
+            <a:lvl8pPr marL="3429000" indent="-228600" algn="l" defTabSz="914400" rtl="0" eaLnBrk="1" latinLnBrk="0" hangingPunct="1">
+              <a:lnSpc>
+                <a:spcPct val="90000"/>
+              </a:lnSpc>
+              <a:spcBef>
+                <a:spcPts val="500"/>
+              </a:spcBef>
+              <a:buFont typeface="Arial" panose="020B0604020202020204" pitchFamily="34" charset="0"/>
+              <a:buChar char="•"/>
+              <a:defRPr sz="1800" kern="1200">
+                <a:solidFill>
+                  <a:schemeClr val="tx1"/>
+                </a:solidFill>
+                <a:latin typeface="+mn-lt"/>
+                <a:ea typeface="+mn-ea"/>
+                <a:cs typeface="+mn-cs"/>
+              </a:defRPr>
+            </a:lvl8pPr>
+            <a:lvl9pPr marL="3886200" indent="-228600" algn="l" defTabSz="914400" rtl="0" eaLnBrk="1" latinLnBrk="0" hangingPunct="1">
+              <a:lnSpc>
+                <a:spcPct val="90000"/>
+              </a:lnSpc>
+              <a:spcBef>
+                <a:spcPts val="500"/>
+              </a:spcBef>
+              <a:buFont typeface="Arial" panose="020B0604020202020204" pitchFamily="34" charset="0"/>
+              <a:buChar char="•"/>
+              <a:defRPr sz="1800" kern="1200">
+                <a:solidFill>
+                  <a:schemeClr val="tx1"/>
+                </a:solidFill>
+                <a:latin typeface="+mn-lt"/>
+                <a:ea typeface="+mn-ea"/>
+                <a:cs typeface="+mn-cs"/>
+              </a:defRPr>
+            </a:lvl9pPr>
+          </a:lstStyle>
+          <a:p>
+            <a:pPr marL="0" indent="0">
+              <a:buNone/>
+            </a:pPr>
+            <a:r>
+              <a:rPr lang="it-IT" dirty="0">
+                <a:latin typeface="Cambria" panose="02040503050406030204" pitchFamily="18" charset="0"/>
+                <a:ea typeface="Cambria" panose="02040503050406030204" pitchFamily="18" charset="0"/>
+              </a:rPr>
+              <a:t>La classe Prestito deve avere:</a:t>
+            </a:r>
+          </a:p>
+          <a:p>
+            <a:pPr marL="0" indent="0">
+              <a:buNone/>
+            </a:pPr>
             <a:endParaRPr lang="it-IT" dirty="0">
               <a:latin typeface="Cambria" panose="02040503050406030204" pitchFamily="18" charset="0"/>
               <a:ea typeface="Cambria" panose="02040503050406030204" pitchFamily="18" charset="0"/>
             </a:endParaRPr>
           </a:p>
+          <a:p>
+            <a:r>
+              <a:rPr lang="it-IT" dirty="0">
+                <a:latin typeface="Cambria" panose="02040503050406030204" pitchFamily="18" charset="0"/>
+                <a:ea typeface="Cambria" panose="02040503050406030204" pitchFamily="18" charset="0"/>
+              </a:rPr>
+              <a:t>3 attributi (</a:t>
+            </a:r>
+            <a:r>
+              <a:rPr lang="it-IT" dirty="0" err="1">
+                <a:latin typeface="Cambria" panose="02040503050406030204" pitchFamily="18" charset="0"/>
+                <a:ea typeface="Cambria" panose="02040503050406030204" pitchFamily="18" charset="0"/>
+              </a:rPr>
+              <a:t>pubblicazionePrestata</a:t>
+            </a:r>
+            <a:r>
+              <a:rPr lang="it-IT" dirty="0">
+                <a:latin typeface="Cambria" panose="02040503050406030204" pitchFamily="18" charset="0"/>
+                <a:ea typeface="Cambria" panose="02040503050406030204" pitchFamily="18" charset="0"/>
+              </a:rPr>
+              <a:t> di tipo Pubblicazione, </a:t>
+            </a:r>
+            <a:r>
+              <a:rPr lang="it-IT" dirty="0" err="1">
+                <a:latin typeface="Cambria" panose="02040503050406030204" pitchFamily="18" charset="0"/>
+                <a:ea typeface="Cambria" panose="02040503050406030204" pitchFamily="18" charset="0"/>
+              </a:rPr>
+              <a:t>utenteAssegnatario</a:t>
+            </a:r>
+            <a:r>
+              <a:rPr lang="it-IT" dirty="0">
+                <a:latin typeface="Cambria" panose="02040503050406030204" pitchFamily="18" charset="0"/>
+                <a:ea typeface="Cambria" panose="02040503050406030204" pitchFamily="18" charset="0"/>
+              </a:rPr>
+              <a:t> di tipo Utente, data scadenza )</a:t>
+            </a:r>
+          </a:p>
+          <a:p>
+            <a:r>
+              <a:rPr lang="it-IT" dirty="0">
+                <a:latin typeface="Cambria" panose="02040503050406030204" pitchFamily="18" charset="0"/>
+                <a:ea typeface="Cambria" panose="02040503050406030204" pitchFamily="18" charset="0"/>
+              </a:rPr>
+              <a:t>Costruttore con 3 parametri</a:t>
+            </a:r>
+          </a:p>
+          <a:p>
+            <a:r>
+              <a:rPr lang="it-IT" dirty="0">
+                <a:latin typeface="Cambria" panose="02040503050406030204" pitchFamily="18" charset="0"/>
+                <a:ea typeface="Cambria" panose="02040503050406030204" pitchFamily="18" charset="0"/>
+              </a:rPr>
+              <a:t>Getter per gli attributi</a:t>
+            </a:r>
+          </a:p>
+          <a:p>
+            <a:r>
+              <a:rPr lang="it-IT" dirty="0" err="1">
+                <a:latin typeface="Cambria" panose="02040503050406030204" pitchFamily="18" charset="0"/>
+                <a:ea typeface="Cambria" panose="02040503050406030204" pitchFamily="18" charset="0"/>
+              </a:rPr>
+              <a:t>Override</a:t>
+            </a:r>
+            <a:r>
+              <a:rPr lang="it-IT" dirty="0">
+                <a:latin typeface="Cambria" panose="02040503050406030204" pitchFamily="18" charset="0"/>
+                <a:ea typeface="Cambria" panose="02040503050406030204" pitchFamily="18" charset="0"/>
+              </a:rPr>
+              <a:t> dei metodi </a:t>
+            </a:r>
+            <a:r>
+              <a:rPr lang="it-IT" dirty="0" err="1">
+                <a:latin typeface="Cambria" panose="02040503050406030204" pitchFamily="18" charset="0"/>
+                <a:ea typeface="Cambria" panose="02040503050406030204" pitchFamily="18" charset="0"/>
+              </a:rPr>
+              <a:t>toString</a:t>
+            </a:r>
+            <a:r>
+              <a:rPr lang="it-IT" dirty="0">
+                <a:latin typeface="Cambria" panose="02040503050406030204" pitchFamily="18" charset="0"/>
+                <a:ea typeface="Cambria" panose="02040503050406030204" pitchFamily="18" charset="0"/>
+              </a:rPr>
+              <a:t> (in modo che ritorni una stringa formattata contenente gli attributi) e </a:t>
+            </a:r>
+            <a:r>
+              <a:rPr lang="it-IT" dirty="0" err="1">
+                <a:latin typeface="Cambria" panose="02040503050406030204" pitchFamily="18" charset="0"/>
+                <a:ea typeface="Cambria" panose="02040503050406030204" pitchFamily="18" charset="0"/>
+              </a:rPr>
+              <a:t>equals</a:t>
+            </a:r>
+            <a:r>
+              <a:rPr lang="it-IT" dirty="0">
+                <a:latin typeface="Cambria" panose="02040503050406030204" pitchFamily="18" charset="0"/>
+                <a:ea typeface="Cambria" panose="02040503050406030204" pitchFamily="18" charset="0"/>
+              </a:rPr>
+              <a:t> (due Prestiti sono uguali se si riferiscono alla stessa pubblicazione)</a:t>
+            </a:r>
+          </a:p>
         </p:txBody>
       </p:sp>
     </p:spTree>
     <p:extLst>
       <p:ext uri="{BB962C8B-B14F-4D97-AF65-F5344CB8AC3E}">
-        <p14:creationId xmlns:p14="http://schemas.microsoft.com/office/powerpoint/2010/main" val="298291907"/>
+        <p14:creationId xmlns:p14="http://schemas.microsoft.com/office/powerpoint/2010/main" val="2181950911"/>
+      </p:ext>
+    </p:extLst>
+  </p:cSld>
+  <p:clrMapOvr>
+    <a:masterClrMapping/>
+  </p:clrMapOvr>
+</p:sld>
+</file>
+
+<file path=ppt/slides/slide8.xml><?xml version="1.0" encoding="utf-8"?>
+<p:sld xmlns:a="http://schemas.openxmlformats.org/drawingml/2006/main" xmlns:r="http://schemas.openxmlformats.org/officeDocument/2006/relationships" xmlns:p="http://schemas.openxmlformats.org/presentationml/2006/main">
+  <p:cSld>
+    <p:spTree>
+      <p:nvGrpSpPr>
+        <p:cNvPr id="1" name="">
+          <a:extLst>
+            <a:ext uri="{FF2B5EF4-FFF2-40B4-BE49-F238E27FC236}">
+              <a16:creationId xmlns:a16="http://schemas.microsoft.com/office/drawing/2014/main" id="{23D5930B-45F2-ABD3-2D39-95C1F94BA2E9}"/>
+            </a:ext>
+          </a:extLst>
+        </p:cNvPr>
+        <p:cNvGrpSpPr/>
+        <p:nvPr/>
+      </p:nvGrpSpPr>
+      <p:grpSpPr>
+        <a:xfrm>
+          <a:off x="0" y="0"/>
+          <a:ext cx="0" cy="0"/>
+          <a:chOff x="0" y="0"/>
+          <a:chExt cx="0" cy="0"/>
+        </a:xfrm>
+      </p:grpSpPr>
+      <p:sp>
+        <p:nvSpPr>
+          <p:cNvPr id="4" name="Segnaposto numero diapositiva 3">
+            <a:extLst>
+              <a:ext uri="{FF2B5EF4-FFF2-40B4-BE49-F238E27FC236}">
+                <a16:creationId xmlns:a16="http://schemas.microsoft.com/office/drawing/2014/main" id="{61E56F1C-A880-4770-E45D-4594D1EF4F2E}"/>
+              </a:ext>
+            </a:extLst>
+          </p:cNvPr>
+          <p:cNvSpPr>
+            <a:spLocks noGrp="1"/>
+          </p:cNvSpPr>
+          <p:nvPr>
+            <p:ph type="sldNum" sz="quarter" idx="12"/>
+          </p:nvPr>
+        </p:nvSpPr>
+        <p:spPr/>
+        <p:txBody>
+          <a:bodyPr/>
+          <a:lstStyle/>
+          <a:p>
+            <a:fld id="{B07BBA08-9429-4EA8-9637-B9613057FD71}" type="slidenum">
+              <a:rPr lang="it-IT" noProof="0" smtClean="0"/>
+              <a:t>8</a:t>
+            </a:fld>
+            <a:endParaRPr lang="it-IT" noProof="0" dirty="0"/>
+          </a:p>
+        </p:txBody>
+      </p:sp>
+      <p:sp>
+        <p:nvSpPr>
+          <p:cNvPr id="7" name="Titolo 1">
+            <a:extLst>
+              <a:ext uri="{FF2B5EF4-FFF2-40B4-BE49-F238E27FC236}">
+                <a16:creationId xmlns:a16="http://schemas.microsoft.com/office/drawing/2014/main" id="{0667927C-BE27-F937-17D1-EE099623C4E1}"/>
+              </a:ext>
+            </a:extLst>
+          </p:cNvPr>
+          <p:cNvSpPr txBox="1">
+            <a:spLocks/>
+          </p:cNvSpPr>
+          <p:nvPr/>
+        </p:nvSpPr>
+        <p:spPr>
+          <a:xfrm>
+            <a:off x="838200" y="223976"/>
+            <a:ext cx="10515600" cy="776341"/>
+          </a:xfrm>
+          <a:prstGeom prst="rect">
+            <a:avLst/>
+          </a:prstGeom>
+        </p:spPr>
+        <p:txBody>
+          <a:bodyPr vert="horz" lIns="91440" tIns="45720" rIns="91440" bIns="45720" rtlCol="0" anchor="ctr">
+            <a:normAutofit/>
+          </a:bodyPr>
+          <a:lstStyle>
+            <a:lvl1pPr algn="l" defTabSz="914400" rtl="0" eaLnBrk="1" latinLnBrk="0" hangingPunct="1">
+              <a:lnSpc>
+                <a:spcPct val="90000"/>
+              </a:lnSpc>
+              <a:spcBef>
+                <a:spcPct val="0"/>
+              </a:spcBef>
+              <a:buNone/>
+              <a:defRPr sz="4400" kern="1200">
+                <a:solidFill>
+                  <a:schemeClr val="tx1"/>
+                </a:solidFill>
+                <a:latin typeface="+mj-lt"/>
+                <a:ea typeface="+mj-ea"/>
+                <a:cs typeface="+mj-cs"/>
+              </a:defRPr>
+            </a:lvl1pPr>
+          </a:lstStyle>
+          <a:p>
+            <a:pPr algn="ctr"/>
+            <a:r>
+              <a:rPr lang="it-IT" b="1" noProof="0" dirty="0">
+                <a:latin typeface="Cambria" panose="02040503050406030204" pitchFamily="18" charset="0"/>
+                <a:ea typeface="Cambria" panose="02040503050406030204" pitchFamily="18" charset="0"/>
+              </a:rPr>
+              <a:t>Classe </a:t>
+            </a:r>
+            <a:r>
+              <a:rPr lang="it-IT" b="1" dirty="0">
+                <a:latin typeface="Cambria" panose="02040503050406030204" pitchFamily="18" charset="0"/>
+                <a:ea typeface="Cambria" panose="02040503050406030204" pitchFamily="18" charset="0"/>
+              </a:rPr>
+              <a:t>Biblioteca </a:t>
+            </a:r>
+            <a:r>
+              <a:rPr lang="it-IT" b="1" noProof="0" dirty="0">
+                <a:latin typeface="Cambria" panose="02040503050406030204" pitchFamily="18" charset="0"/>
+                <a:ea typeface="Cambria" panose="02040503050406030204" pitchFamily="18" charset="0"/>
+              </a:rPr>
+              <a:t> </a:t>
+            </a:r>
+          </a:p>
+        </p:txBody>
+      </p:sp>
+      <p:sp>
+        <p:nvSpPr>
+          <p:cNvPr id="8" name="Rettangolo 7">
+            <a:extLst>
+              <a:ext uri="{FF2B5EF4-FFF2-40B4-BE49-F238E27FC236}">
+                <a16:creationId xmlns:a16="http://schemas.microsoft.com/office/drawing/2014/main" id="{86D87D87-FE07-3A02-8CDC-BF966907F73A}"/>
+              </a:ext>
+            </a:extLst>
+          </p:cNvPr>
+          <p:cNvSpPr/>
+          <p:nvPr/>
+        </p:nvSpPr>
+        <p:spPr>
+          <a:xfrm>
+            <a:off x="0" y="6413074"/>
+            <a:ext cx="12192000" cy="444926"/>
+          </a:xfrm>
+          <a:prstGeom prst="rect">
+            <a:avLst/>
+          </a:prstGeom>
+          <a:solidFill>
+            <a:srgbClr val="1B69B0"/>
+          </a:solidFill>
+          <a:ln>
+            <a:solidFill>
+              <a:srgbClr val="1B69B0"/>
+            </a:solidFill>
+          </a:ln>
+        </p:spPr>
+        <p:style>
+          <a:lnRef idx="2">
+            <a:schemeClr val="accent1">
+              <a:shade val="15000"/>
+            </a:schemeClr>
+          </a:lnRef>
+          <a:fillRef idx="1">
+            <a:schemeClr val="accent1"/>
+          </a:fillRef>
+          <a:effectRef idx="0">
+            <a:schemeClr val="accent1"/>
+          </a:effectRef>
+          <a:fontRef idx="minor">
+            <a:schemeClr val="lt1"/>
+          </a:fontRef>
+        </p:style>
+        <p:txBody>
+          <a:bodyPr rtlCol="0" anchor="ctr"/>
+          <a:lstStyle/>
+          <a:p>
+            <a:pPr algn="ctr"/>
+            <a:endParaRPr lang="it-IT" noProof="0" dirty="0"/>
+          </a:p>
+        </p:txBody>
+      </p:sp>
+      <p:sp>
+        <p:nvSpPr>
+          <p:cNvPr id="9" name="Segnaposto numero diapositiva 9">
+            <a:extLst>
+              <a:ext uri="{FF2B5EF4-FFF2-40B4-BE49-F238E27FC236}">
+                <a16:creationId xmlns:a16="http://schemas.microsoft.com/office/drawing/2014/main" id="{4F61A094-99B9-B1B3-DF3F-0888C53F5374}"/>
+              </a:ext>
+            </a:extLst>
+          </p:cNvPr>
+          <p:cNvSpPr txBox="1">
+            <a:spLocks/>
+          </p:cNvSpPr>
+          <p:nvPr/>
+        </p:nvSpPr>
+        <p:spPr>
+          <a:xfrm>
+            <a:off x="5930303" y="6451461"/>
+            <a:ext cx="331394" cy="365125"/>
+          </a:xfrm>
+          <a:prstGeom prst="rect">
+            <a:avLst/>
+          </a:prstGeom>
+        </p:spPr>
+        <p:txBody>
+          <a:bodyPr vert="horz" lIns="91440" tIns="45720" rIns="91440" bIns="45720" rtlCol="0" anchor="ctr"/>
+          <a:lstStyle>
+            <a:defPPr>
+              <a:defRPr lang="it-IT"/>
+            </a:defPPr>
+            <a:lvl1pPr marL="0" algn="r" defTabSz="914400" rtl="0" eaLnBrk="1" latinLnBrk="0" hangingPunct="1">
+              <a:defRPr sz="1200" kern="1200">
+                <a:solidFill>
+                  <a:schemeClr val="tx1">
+                    <a:tint val="82000"/>
+                  </a:schemeClr>
+                </a:solidFill>
+                <a:latin typeface="+mn-lt"/>
+                <a:ea typeface="+mn-ea"/>
+                <a:cs typeface="+mn-cs"/>
+              </a:defRPr>
+            </a:lvl1pPr>
+            <a:lvl2pPr marL="457200" algn="l" defTabSz="914400" rtl="0" eaLnBrk="1" latinLnBrk="0" hangingPunct="1">
+              <a:defRPr sz="1800" kern="1200">
+                <a:solidFill>
+                  <a:schemeClr val="tx1"/>
+                </a:solidFill>
+                <a:latin typeface="+mn-lt"/>
+                <a:ea typeface="+mn-ea"/>
+                <a:cs typeface="+mn-cs"/>
+              </a:defRPr>
+            </a:lvl2pPr>
+            <a:lvl3pPr marL="914400" algn="l" defTabSz="914400" rtl="0" eaLnBrk="1" latinLnBrk="0" hangingPunct="1">
+              <a:defRPr sz="1800" kern="1200">
+                <a:solidFill>
+                  <a:schemeClr val="tx1"/>
+                </a:solidFill>
+                <a:latin typeface="+mn-lt"/>
+                <a:ea typeface="+mn-ea"/>
+                <a:cs typeface="+mn-cs"/>
+              </a:defRPr>
+            </a:lvl3pPr>
+            <a:lvl4pPr marL="1371600" algn="l" defTabSz="914400" rtl="0" eaLnBrk="1" latinLnBrk="0" hangingPunct="1">
+              <a:defRPr sz="1800" kern="1200">
+                <a:solidFill>
+                  <a:schemeClr val="tx1"/>
+                </a:solidFill>
+                <a:latin typeface="+mn-lt"/>
+                <a:ea typeface="+mn-ea"/>
+                <a:cs typeface="+mn-cs"/>
+              </a:defRPr>
+            </a:lvl4pPr>
+            <a:lvl5pPr marL="1828800" algn="l" defTabSz="914400" rtl="0" eaLnBrk="1" latinLnBrk="0" hangingPunct="1">
+              <a:defRPr sz="1800" kern="1200">
+                <a:solidFill>
+                  <a:schemeClr val="tx1"/>
+                </a:solidFill>
+                <a:latin typeface="+mn-lt"/>
+                <a:ea typeface="+mn-ea"/>
+                <a:cs typeface="+mn-cs"/>
+              </a:defRPr>
+            </a:lvl5pPr>
+            <a:lvl6pPr marL="2286000" algn="l" defTabSz="914400" rtl="0" eaLnBrk="1" latinLnBrk="0" hangingPunct="1">
+              <a:defRPr sz="1800" kern="1200">
+                <a:solidFill>
+                  <a:schemeClr val="tx1"/>
+                </a:solidFill>
+                <a:latin typeface="+mn-lt"/>
+                <a:ea typeface="+mn-ea"/>
+                <a:cs typeface="+mn-cs"/>
+              </a:defRPr>
+            </a:lvl6pPr>
+            <a:lvl7pPr marL="2743200" algn="l" defTabSz="914400" rtl="0" eaLnBrk="1" latinLnBrk="0" hangingPunct="1">
+              <a:defRPr sz="1800" kern="1200">
+                <a:solidFill>
+                  <a:schemeClr val="tx1"/>
+                </a:solidFill>
+                <a:latin typeface="+mn-lt"/>
+                <a:ea typeface="+mn-ea"/>
+                <a:cs typeface="+mn-cs"/>
+              </a:defRPr>
+            </a:lvl7pPr>
+            <a:lvl8pPr marL="3200400" algn="l" defTabSz="914400" rtl="0" eaLnBrk="1" latinLnBrk="0" hangingPunct="1">
+              <a:defRPr sz="1800" kern="1200">
+                <a:solidFill>
+                  <a:schemeClr val="tx1"/>
+                </a:solidFill>
+                <a:latin typeface="+mn-lt"/>
+                <a:ea typeface="+mn-ea"/>
+                <a:cs typeface="+mn-cs"/>
+              </a:defRPr>
+            </a:lvl8pPr>
+            <a:lvl9pPr marL="3657600" algn="l" defTabSz="914400" rtl="0" eaLnBrk="1" latinLnBrk="0" hangingPunct="1">
+              <a:defRPr sz="1800" kern="1200">
+                <a:solidFill>
+                  <a:schemeClr val="tx1"/>
+                </a:solidFill>
+                <a:latin typeface="+mn-lt"/>
+                <a:ea typeface="+mn-ea"/>
+                <a:cs typeface="+mn-cs"/>
+              </a:defRPr>
+            </a:lvl9pPr>
+          </a:lstStyle>
+          <a:p>
+            <a:pPr algn="ctr"/>
+            <a:r>
+              <a:rPr lang="it-IT" sz="1800" b="1" dirty="0">
+                <a:solidFill>
+                  <a:schemeClr val="bg1"/>
+                </a:solidFill>
+                <a:latin typeface="Cambria" panose="02040503050406030204" pitchFamily="18" charset="0"/>
+                <a:ea typeface="Cambria" panose="02040503050406030204" pitchFamily="18" charset="0"/>
+              </a:rPr>
+              <a:t>8</a:t>
+            </a:r>
+            <a:endParaRPr lang="it-IT" sz="1800" b="1" noProof="0" dirty="0">
+              <a:solidFill>
+                <a:schemeClr val="bg1"/>
+              </a:solidFill>
+              <a:latin typeface="Cambria" panose="02040503050406030204" pitchFamily="18" charset="0"/>
+              <a:ea typeface="Cambria" panose="02040503050406030204" pitchFamily="18" charset="0"/>
+            </a:endParaRPr>
+          </a:p>
+        </p:txBody>
+      </p:sp>
+      <p:sp>
+        <p:nvSpPr>
+          <p:cNvPr id="6" name="Segnaposto contenuto 2">
+            <a:extLst>
+              <a:ext uri="{FF2B5EF4-FFF2-40B4-BE49-F238E27FC236}">
+                <a16:creationId xmlns:a16="http://schemas.microsoft.com/office/drawing/2014/main" id="{13092CD8-6C7B-B150-5302-C29A420B5185}"/>
+              </a:ext>
+            </a:extLst>
+          </p:cNvPr>
+          <p:cNvSpPr txBox="1">
+            <a:spLocks/>
+          </p:cNvSpPr>
+          <p:nvPr/>
+        </p:nvSpPr>
+        <p:spPr>
+          <a:xfrm>
+            <a:off x="838200" y="1515818"/>
+            <a:ext cx="10515600" cy="4559780"/>
+          </a:xfrm>
+          <a:prstGeom prst="rect">
+            <a:avLst/>
+          </a:prstGeom>
+        </p:spPr>
+        <p:txBody>
+          <a:bodyPr vert="horz" lIns="91440" tIns="45720" rIns="91440" bIns="45720" rtlCol="0">
+            <a:normAutofit/>
+          </a:bodyPr>
+          <a:lstStyle>
+            <a:lvl1pPr marL="228600" indent="-228600" algn="l" defTabSz="914400" rtl="0" eaLnBrk="1" latinLnBrk="0" hangingPunct="1">
+              <a:lnSpc>
+                <a:spcPct val="90000"/>
+              </a:lnSpc>
+              <a:spcBef>
+                <a:spcPts val="1000"/>
+              </a:spcBef>
+              <a:buFont typeface="Arial" panose="020B0604020202020204" pitchFamily="34" charset="0"/>
+              <a:buChar char="•"/>
+              <a:defRPr sz="2800" kern="1200">
+                <a:solidFill>
+                  <a:schemeClr val="tx1"/>
+                </a:solidFill>
+                <a:latin typeface="+mn-lt"/>
+                <a:ea typeface="+mn-ea"/>
+                <a:cs typeface="+mn-cs"/>
+              </a:defRPr>
+            </a:lvl1pPr>
+            <a:lvl2pPr marL="685800" indent="-228600" algn="l" defTabSz="914400" rtl="0" eaLnBrk="1" latinLnBrk="0" hangingPunct="1">
+              <a:lnSpc>
+                <a:spcPct val="90000"/>
+              </a:lnSpc>
+              <a:spcBef>
+                <a:spcPts val="500"/>
+              </a:spcBef>
+              <a:buFont typeface="Arial" panose="020B0604020202020204" pitchFamily="34" charset="0"/>
+              <a:buChar char="•"/>
+              <a:defRPr sz="2400" kern="1200">
+                <a:solidFill>
+                  <a:schemeClr val="tx1"/>
+                </a:solidFill>
+                <a:latin typeface="+mn-lt"/>
+                <a:ea typeface="+mn-ea"/>
+                <a:cs typeface="+mn-cs"/>
+              </a:defRPr>
+            </a:lvl2pPr>
+            <a:lvl3pPr marL="1143000" indent="-228600" algn="l" defTabSz="914400" rtl="0" eaLnBrk="1" latinLnBrk="0" hangingPunct="1">
+              <a:lnSpc>
+                <a:spcPct val="90000"/>
+              </a:lnSpc>
+              <a:spcBef>
+                <a:spcPts val="500"/>
+              </a:spcBef>
+              <a:buFont typeface="Arial" panose="020B0604020202020204" pitchFamily="34" charset="0"/>
+              <a:buChar char="•"/>
+              <a:defRPr sz="2000" kern="1200">
+                <a:solidFill>
+                  <a:schemeClr val="tx1"/>
+                </a:solidFill>
+                <a:latin typeface="+mn-lt"/>
+                <a:ea typeface="+mn-ea"/>
+                <a:cs typeface="+mn-cs"/>
+              </a:defRPr>
+            </a:lvl3pPr>
+            <a:lvl4pPr marL="1600200" indent="-228600" algn="l" defTabSz="914400" rtl="0" eaLnBrk="1" latinLnBrk="0" hangingPunct="1">
+              <a:lnSpc>
+                <a:spcPct val="90000"/>
+              </a:lnSpc>
+              <a:spcBef>
+                <a:spcPts val="500"/>
+              </a:spcBef>
+              <a:buFont typeface="Arial" panose="020B0604020202020204" pitchFamily="34" charset="0"/>
+              <a:buChar char="•"/>
+              <a:defRPr sz="1800" kern="1200">
+                <a:solidFill>
+                  <a:schemeClr val="tx1"/>
+                </a:solidFill>
+                <a:latin typeface="+mn-lt"/>
+                <a:ea typeface="+mn-ea"/>
+                <a:cs typeface="+mn-cs"/>
+              </a:defRPr>
+            </a:lvl4pPr>
+            <a:lvl5pPr marL="2057400" indent="-228600" algn="l" defTabSz="914400" rtl="0" eaLnBrk="1" latinLnBrk="0" hangingPunct="1">
+              <a:lnSpc>
+                <a:spcPct val="90000"/>
+              </a:lnSpc>
+              <a:spcBef>
+                <a:spcPts val="500"/>
+              </a:spcBef>
+              <a:buFont typeface="Arial" panose="020B0604020202020204" pitchFamily="34" charset="0"/>
+              <a:buChar char="•"/>
+              <a:defRPr sz="1800" kern="1200">
+                <a:solidFill>
+                  <a:schemeClr val="tx1"/>
+                </a:solidFill>
+                <a:latin typeface="+mn-lt"/>
+                <a:ea typeface="+mn-ea"/>
+                <a:cs typeface="+mn-cs"/>
+              </a:defRPr>
+            </a:lvl5pPr>
+            <a:lvl6pPr marL="2514600" indent="-228600" algn="l" defTabSz="914400" rtl="0" eaLnBrk="1" latinLnBrk="0" hangingPunct="1">
+              <a:lnSpc>
+                <a:spcPct val="90000"/>
+              </a:lnSpc>
+              <a:spcBef>
+                <a:spcPts val="500"/>
+              </a:spcBef>
+              <a:buFont typeface="Arial" panose="020B0604020202020204" pitchFamily="34" charset="0"/>
+              <a:buChar char="•"/>
+              <a:defRPr sz="1800" kern="1200">
+                <a:solidFill>
+                  <a:schemeClr val="tx1"/>
+                </a:solidFill>
+                <a:latin typeface="+mn-lt"/>
+                <a:ea typeface="+mn-ea"/>
+                <a:cs typeface="+mn-cs"/>
+              </a:defRPr>
+            </a:lvl6pPr>
+            <a:lvl7pPr marL="2971800" indent="-228600" algn="l" defTabSz="914400" rtl="0" eaLnBrk="1" latinLnBrk="0" hangingPunct="1">
+              <a:lnSpc>
+                <a:spcPct val="90000"/>
+              </a:lnSpc>
+              <a:spcBef>
+                <a:spcPts val="500"/>
+              </a:spcBef>
+              <a:buFont typeface="Arial" panose="020B0604020202020204" pitchFamily="34" charset="0"/>
+              <a:buChar char="•"/>
+              <a:defRPr sz="1800" kern="1200">
+                <a:solidFill>
+                  <a:schemeClr val="tx1"/>
+                </a:solidFill>
+                <a:latin typeface="+mn-lt"/>
+                <a:ea typeface="+mn-ea"/>
+                <a:cs typeface="+mn-cs"/>
+              </a:defRPr>
+            </a:lvl7pPr>
+            <a:lvl8pPr marL="3429000" indent="-228600" algn="l" defTabSz="914400" rtl="0" eaLnBrk="1" latinLnBrk="0" hangingPunct="1">
+              <a:lnSpc>
+                <a:spcPct val="90000"/>
+              </a:lnSpc>
+              <a:spcBef>
+                <a:spcPts val="500"/>
+              </a:spcBef>
+              <a:buFont typeface="Arial" panose="020B0604020202020204" pitchFamily="34" charset="0"/>
+              <a:buChar char="•"/>
+              <a:defRPr sz="1800" kern="1200">
+                <a:solidFill>
+                  <a:schemeClr val="tx1"/>
+                </a:solidFill>
+                <a:latin typeface="+mn-lt"/>
+                <a:ea typeface="+mn-ea"/>
+                <a:cs typeface="+mn-cs"/>
+              </a:defRPr>
+            </a:lvl8pPr>
+            <a:lvl9pPr marL="3886200" indent="-228600" algn="l" defTabSz="914400" rtl="0" eaLnBrk="1" latinLnBrk="0" hangingPunct="1">
+              <a:lnSpc>
+                <a:spcPct val="90000"/>
+              </a:lnSpc>
+              <a:spcBef>
+                <a:spcPts val="500"/>
+              </a:spcBef>
+              <a:buFont typeface="Arial" panose="020B0604020202020204" pitchFamily="34" charset="0"/>
+              <a:buChar char="•"/>
+              <a:defRPr sz="1800" kern="1200">
+                <a:solidFill>
+                  <a:schemeClr val="tx1"/>
+                </a:solidFill>
+                <a:latin typeface="+mn-lt"/>
+                <a:ea typeface="+mn-ea"/>
+                <a:cs typeface="+mn-cs"/>
+              </a:defRPr>
+            </a:lvl9pPr>
+          </a:lstStyle>
+          <a:p>
+            <a:pPr marL="0" indent="0">
+              <a:buNone/>
+            </a:pPr>
+            <a:r>
+              <a:rPr lang="it-IT" dirty="0">
+                <a:latin typeface="Cambria" panose="02040503050406030204" pitchFamily="18" charset="0"/>
+                <a:ea typeface="Cambria" panose="02040503050406030204" pitchFamily="18" charset="0"/>
+              </a:rPr>
+              <a:t>La classe Biblioteca deve avere:</a:t>
+            </a:r>
+          </a:p>
+          <a:p>
+            <a:endParaRPr lang="it-IT" dirty="0">
+              <a:latin typeface="Cambria" panose="02040503050406030204" pitchFamily="18" charset="0"/>
+              <a:ea typeface="Cambria" panose="02040503050406030204" pitchFamily="18" charset="0"/>
+            </a:endParaRPr>
+          </a:p>
+          <a:p>
+            <a:r>
+              <a:rPr lang="it-IT" dirty="0">
+                <a:latin typeface="Cambria" panose="02040503050406030204" pitchFamily="18" charset="0"/>
+                <a:ea typeface="Cambria" panose="02040503050406030204" pitchFamily="18" charset="0"/>
+              </a:rPr>
+              <a:t>1 attributo (array dinamico di Prestiti)</a:t>
+            </a:r>
+          </a:p>
+          <a:p>
+            <a:r>
+              <a:rPr lang="it-IT" dirty="0">
+                <a:latin typeface="Cambria" panose="02040503050406030204" pitchFamily="18" charset="0"/>
+                <a:ea typeface="Cambria" panose="02040503050406030204" pitchFamily="18" charset="0"/>
+              </a:rPr>
+              <a:t>Costruttore senza parametri</a:t>
+            </a:r>
+          </a:p>
+          <a:p>
+            <a:r>
+              <a:rPr lang="it-IT" dirty="0">
+                <a:latin typeface="Cambria" panose="02040503050406030204" pitchFamily="18" charset="0"/>
+                <a:ea typeface="Cambria" panose="02040503050406030204" pitchFamily="18" charset="0"/>
+              </a:rPr>
+              <a:t>Metodo </a:t>
+            </a:r>
+            <a:r>
+              <a:rPr lang="it-IT" dirty="0" err="1">
+                <a:latin typeface="Cambria" panose="02040503050406030204" pitchFamily="18" charset="0"/>
+                <a:ea typeface="Cambria" panose="02040503050406030204" pitchFamily="18" charset="0"/>
+              </a:rPr>
+              <a:t>registraPrestito</a:t>
+            </a:r>
+            <a:r>
+              <a:rPr lang="it-IT" dirty="0">
+                <a:latin typeface="Cambria" panose="02040503050406030204" pitchFamily="18" charset="0"/>
+                <a:ea typeface="Cambria" panose="02040503050406030204" pitchFamily="18" charset="0"/>
+              </a:rPr>
+              <a:t>(Prestito p) che aggiunge un prestito all’array. Il metodo lancia un’eccezione non controllata (da definire) </a:t>
+            </a:r>
+            <a:r>
+              <a:rPr lang="it-IT" dirty="0" err="1">
+                <a:latin typeface="Cambria" panose="02040503050406030204" pitchFamily="18" charset="0"/>
+                <a:ea typeface="Cambria" panose="02040503050406030204" pitchFamily="18" charset="0"/>
+              </a:rPr>
+              <a:t>PubblicazioneGiaPrestataException</a:t>
+            </a:r>
+            <a:r>
+              <a:rPr lang="it-IT" dirty="0">
+                <a:latin typeface="Cambria" panose="02040503050406030204" pitchFamily="18" charset="0"/>
+                <a:ea typeface="Cambria" panose="02040503050406030204" pitchFamily="18" charset="0"/>
+              </a:rPr>
+              <a:t> se la pubblicazione è già in </a:t>
+            </a:r>
+            <a:r>
+              <a:rPr lang="it-IT" dirty="0" err="1">
+                <a:latin typeface="Cambria" panose="02040503050406030204" pitchFamily="18" charset="0"/>
+                <a:ea typeface="Cambria" panose="02040503050406030204" pitchFamily="18" charset="0"/>
+              </a:rPr>
+              <a:t>prestitò</a:t>
+            </a:r>
+            <a:endParaRPr lang="it-IT" dirty="0">
+              <a:latin typeface="Cambria" panose="02040503050406030204" pitchFamily="18" charset="0"/>
+              <a:ea typeface="Cambria" panose="02040503050406030204" pitchFamily="18" charset="0"/>
+            </a:endParaRPr>
+          </a:p>
+        </p:txBody>
+      </p:sp>
+    </p:spTree>
+    <p:extLst>
+      <p:ext uri="{BB962C8B-B14F-4D97-AF65-F5344CB8AC3E}">
+        <p14:creationId xmlns:p14="http://schemas.microsoft.com/office/powerpoint/2010/main" val="2182501413"/>
+      </p:ext>
+    </p:extLst>
+  </p:cSld>
+  <p:clrMapOvr>
+    <a:masterClrMapping/>
+  </p:clrMapOvr>
+</p:sld>
+</file>
+
+<file path=ppt/slides/slide9.xml><?xml version="1.0" encoding="utf-8"?>
+<p:sld xmlns:a="http://schemas.openxmlformats.org/drawingml/2006/main" xmlns:r="http://schemas.openxmlformats.org/officeDocument/2006/relationships" xmlns:p="http://schemas.openxmlformats.org/presentationml/2006/main">
+  <p:cSld>
+    <p:spTree>
+      <p:nvGrpSpPr>
+        <p:cNvPr id="1" name="">
+          <a:extLst>
+            <a:ext uri="{FF2B5EF4-FFF2-40B4-BE49-F238E27FC236}">
+              <a16:creationId xmlns:a16="http://schemas.microsoft.com/office/drawing/2014/main" id="{FFF3E170-E55D-C6D8-CE33-0349995965E2}"/>
+            </a:ext>
+          </a:extLst>
+        </p:cNvPr>
+        <p:cNvGrpSpPr/>
+        <p:nvPr/>
+      </p:nvGrpSpPr>
+      <p:grpSpPr>
+        <a:xfrm>
+          <a:off x="0" y="0"/>
+          <a:ext cx="0" cy="0"/>
+          <a:chOff x="0" y="0"/>
+          <a:chExt cx="0" cy="0"/>
+        </a:xfrm>
+      </p:grpSpPr>
+      <p:sp>
+        <p:nvSpPr>
+          <p:cNvPr id="4" name="Segnaposto numero diapositiva 3">
+            <a:extLst>
+              <a:ext uri="{FF2B5EF4-FFF2-40B4-BE49-F238E27FC236}">
+                <a16:creationId xmlns:a16="http://schemas.microsoft.com/office/drawing/2014/main" id="{86DDFAAB-9237-3FA7-2984-DD0F65D3F989}"/>
+              </a:ext>
+            </a:extLst>
+          </p:cNvPr>
+          <p:cNvSpPr>
+            <a:spLocks noGrp="1"/>
+          </p:cNvSpPr>
+          <p:nvPr>
+            <p:ph type="sldNum" sz="quarter" idx="12"/>
+          </p:nvPr>
+        </p:nvSpPr>
+        <p:spPr/>
+        <p:txBody>
+          <a:bodyPr/>
+          <a:lstStyle/>
+          <a:p>
+            <a:fld id="{B07BBA08-9429-4EA8-9637-B9613057FD71}" type="slidenum">
+              <a:rPr lang="it-IT" noProof="0" smtClean="0"/>
+              <a:t>9</a:t>
+            </a:fld>
+            <a:endParaRPr lang="it-IT" noProof="0" dirty="0"/>
+          </a:p>
+        </p:txBody>
+      </p:sp>
+      <p:sp>
+        <p:nvSpPr>
+          <p:cNvPr id="7" name="Titolo 1">
+            <a:extLst>
+              <a:ext uri="{FF2B5EF4-FFF2-40B4-BE49-F238E27FC236}">
+                <a16:creationId xmlns:a16="http://schemas.microsoft.com/office/drawing/2014/main" id="{77D2E8F5-139E-4879-3591-789AB387666B}"/>
+              </a:ext>
+            </a:extLst>
+          </p:cNvPr>
+          <p:cNvSpPr txBox="1">
+            <a:spLocks/>
+          </p:cNvSpPr>
+          <p:nvPr/>
+        </p:nvSpPr>
+        <p:spPr>
+          <a:xfrm>
+            <a:off x="838200" y="223976"/>
+            <a:ext cx="10515600" cy="776341"/>
+          </a:xfrm>
+          <a:prstGeom prst="rect">
+            <a:avLst/>
+          </a:prstGeom>
+        </p:spPr>
+        <p:txBody>
+          <a:bodyPr vert="horz" lIns="91440" tIns="45720" rIns="91440" bIns="45720" rtlCol="0" anchor="ctr">
+            <a:normAutofit/>
+          </a:bodyPr>
+          <a:lstStyle>
+            <a:lvl1pPr algn="l" defTabSz="914400" rtl="0" eaLnBrk="1" latinLnBrk="0" hangingPunct="1">
+              <a:lnSpc>
+                <a:spcPct val="90000"/>
+              </a:lnSpc>
+              <a:spcBef>
+                <a:spcPct val="0"/>
+              </a:spcBef>
+              <a:buNone/>
+              <a:defRPr sz="4400" kern="1200">
+                <a:solidFill>
+                  <a:schemeClr val="tx1"/>
+                </a:solidFill>
+                <a:latin typeface="+mj-lt"/>
+                <a:ea typeface="+mj-ea"/>
+                <a:cs typeface="+mj-cs"/>
+              </a:defRPr>
+            </a:lvl1pPr>
+          </a:lstStyle>
+          <a:p>
+            <a:pPr algn="ctr"/>
+            <a:r>
+              <a:rPr lang="it-IT" b="1" noProof="0" dirty="0">
+                <a:latin typeface="Cambria" panose="02040503050406030204" pitchFamily="18" charset="0"/>
+                <a:ea typeface="Cambria" panose="02040503050406030204" pitchFamily="18" charset="0"/>
+              </a:rPr>
+              <a:t>Classe </a:t>
+            </a:r>
+            <a:r>
+              <a:rPr lang="it-IT" b="1" dirty="0">
+                <a:latin typeface="Cambria" panose="02040503050406030204" pitchFamily="18" charset="0"/>
+                <a:ea typeface="Cambria" panose="02040503050406030204" pitchFamily="18" charset="0"/>
+              </a:rPr>
+              <a:t>Biblioteca </a:t>
+            </a:r>
+            <a:r>
+              <a:rPr lang="it-IT" b="1" noProof="0" dirty="0">
+                <a:latin typeface="Cambria" panose="02040503050406030204" pitchFamily="18" charset="0"/>
+                <a:ea typeface="Cambria" panose="02040503050406030204" pitchFamily="18" charset="0"/>
+              </a:rPr>
+              <a:t> </a:t>
+            </a:r>
+          </a:p>
+        </p:txBody>
+      </p:sp>
+      <p:sp>
+        <p:nvSpPr>
+          <p:cNvPr id="8" name="Rettangolo 7">
+            <a:extLst>
+              <a:ext uri="{FF2B5EF4-FFF2-40B4-BE49-F238E27FC236}">
+                <a16:creationId xmlns:a16="http://schemas.microsoft.com/office/drawing/2014/main" id="{BA20F3A0-901A-7BC6-8149-838DF4CE8256}"/>
+              </a:ext>
+            </a:extLst>
+          </p:cNvPr>
+          <p:cNvSpPr/>
+          <p:nvPr/>
+        </p:nvSpPr>
+        <p:spPr>
+          <a:xfrm>
+            <a:off x="0" y="6413074"/>
+            <a:ext cx="12192000" cy="444926"/>
+          </a:xfrm>
+          <a:prstGeom prst="rect">
+            <a:avLst/>
+          </a:prstGeom>
+          <a:solidFill>
+            <a:srgbClr val="1B69B0"/>
+          </a:solidFill>
+          <a:ln>
+            <a:solidFill>
+              <a:srgbClr val="1B69B0"/>
+            </a:solidFill>
+          </a:ln>
+        </p:spPr>
+        <p:style>
+          <a:lnRef idx="2">
+            <a:schemeClr val="accent1">
+              <a:shade val="15000"/>
+            </a:schemeClr>
+          </a:lnRef>
+          <a:fillRef idx="1">
+            <a:schemeClr val="accent1"/>
+          </a:fillRef>
+          <a:effectRef idx="0">
+            <a:schemeClr val="accent1"/>
+          </a:effectRef>
+          <a:fontRef idx="minor">
+            <a:schemeClr val="lt1"/>
+          </a:fontRef>
+        </p:style>
+        <p:txBody>
+          <a:bodyPr rtlCol="0" anchor="ctr"/>
+          <a:lstStyle/>
+          <a:p>
+            <a:pPr algn="ctr"/>
+            <a:endParaRPr lang="it-IT" noProof="0" dirty="0"/>
+          </a:p>
+        </p:txBody>
+      </p:sp>
+      <p:sp>
+        <p:nvSpPr>
+          <p:cNvPr id="9" name="Segnaposto numero diapositiva 9">
+            <a:extLst>
+              <a:ext uri="{FF2B5EF4-FFF2-40B4-BE49-F238E27FC236}">
+                <a16:creationId xmlns:a16="http://schemas.microsoft.com/office/drawing/2014/main" id="{F0B1A91C-94A3-065C-16EA-5E6A6B4F1382}"/>
+              </a:ext>
+            </a:extLst>
+          </p:cNvPr>
+          <p:cNvSpPr txBox="1">
+            <a:spLocks/>
+          </p:cNvSpPr>
+          <p:nvPr/>
+        </p:nvSpPr>
+        <p:spPr>
+          <a:xfrm>
+            <a:off x="5930303" y="6451461"/>
+            <a:ext cx="331394" cy="365125"/>
+          </a:xfrm>
+          <a:prstGeom prst="rect">
+            <a:avLst/>
+          </a:prstGeom>
+        </p:spPr>
+        <p:txBody>
+          <a:bodyPr vert="horz" lIns="91440" tIns="45720" rIns="91440" bIns="45720" rtlCol="0" anchor="ctr"/>
+          <a:lstStyle>
+            <a:defPPr>
+              <a:defRPr lang="it-IT"/>
+            </a:defPPr>
+            <a:lvl1pPr marL="0" algn="r" defTabSz="914400" rtl="0" eaLnBrk="1" latinLnBrk="0" hangingPunct="1">
+              <a:defRPr sz="1200" kern="1200">
+                <a:solidFill>
+                  <a:schemeClr val="tx1">
+                    <a:tint val="82000"/>
+                  </a:schemeClr>
+                </a:solidFill>
+                <a:latin typeface="+mn-lt"/>
+                <a:ea typeface="+mn-ea"/>
+                <a:cs typeface="+mn-cs"/>
+              </a:defRPr>
+            </a:lvl1pPr>
+            <a:lvl2pPr marL="457200" algn="l" defTabSz="914400" rtl="0" eaLnBrk="1" latinLnBrk="0" hangingPunct="1">
+              <a:defRPr sz="1800" kern="1200">
+                <a:solidFill>
+                  <a:schemeClr val="tx1"/>
+                </a:solidFill>
+                <a:latin typeface="+mn-lt"/>
+                <a:ea typeface="+mn-ea"/>
+                <a:cs typeface="+mn-cs"/>
+              </a:defRPr>
+            </a:lvl2pPr>
+            <a:lvl3pPr marL="914400" algn="l" defTabSz="914400" rtl="0" eaLnBrk="1" latinLnBrk="0" hangingPunct="1">
+              <a:defRPr sz="1800" kern="1200">
+                <a:solidFill>
+                  <a:schemeClr val="tx1"/>
+                </a:solidFill>
+                <a:latin typeface="+mn-lt"/>
+                <a:ea typeface="+mn-ea"/>
+                <a:cs typeface="+mn-cs"/>
+              </a:defRPr>
+            </a:lvl3pPr>
+            <a:lvl4pPr marL="1371600" algn="l" defTabSz="914400" rtl="0" eaLnBrk="1" latinLnBrk="0" hangingPunct="1">
+              <a:defRPr sz="1800" kern="1200">
+                <a:solidFill>
+                  <a:schemeClr val="tx1"/>
+                </a:solidFill>
+                <a:latin typeface="+mn-lt"/>
+                <a:ea typeface="+mn-ea"/>
+                <a:cs typeface="+mn-cs"/>
+              </a:defRPr>
+            </a:lvl4pPr>
+            <a:lvl5pPr marL="1828800" algn="l" defTabSz="914400" rtl="0" eaLnBrk="1" latinLnBrk="0" hangingPunct="1">
+              <a:defRPr sz="1800" kern="1200">
+                <a:solidFill>
+                  <a:schemeClr val="tx1"/>
+                </a:solidFill>
+                <a:latin typeface="+mn-lt"/>
+                <a:ea typeface="+mn-ea"/>
+                <a:cs typeface="+mn-cs"/>
+              </a:defRPr>
+            </a:lvl5pPr>
+            <a:lvl6pPr marL="2286000" algn="l" defTabSz="914400" rtl="0" eaLnBrk="1" latinLnBrk="0" hangingPunct="1">
+              <a:defRPr sz="1800" kern="1200">
+                <a:solidFill>
+                  <a:schemeClr val="tx1"/>
+                </a:solidFill>
+                <a:latin typeface="+mn-lt"/>
+                <a:ea typeface="+mn-ea"/>
+                <a:cs typeface="+mn-cs"/>
+              </a:defRPr>
+            </a:lvl6pPr>
+            <a:lvl7pPr marL="2743200" algn="l" defTabSz="914400" rtl="0" eaLnBrk="1" latinLnBrk="0" hangingPunct="1">
+              <a:defRPr sz="1800" kern="1200">
+                <a:solidFill>
+                  <a:schemeClr val="tx1"/>
+                </a:solidFill>
+                <a:latin typeface="+mn-lt"/>
+                <a:ea typeface="+mn-ea"/>
+                <a:cs typeface="+mn-cs"/>
+              </a:defRPr>
+            </a:lvl7pPr>
+            <a:lvl8pPr marL="3200400" algn="l" defTabSz="914400" rtl="0" eaLnBrk="1" latinLnBrk="0" hangingPunct="1">
+              <a:defRPr sz="1800" kern="1200">
+                <a:solidFill>
+                  <a:schemeClr val="tx1"/>
+                </a:solidFill>
+                <a:latin typeface="+mn-lt"/>
+                <a:ea typeface="+mn-ea"/>
+                <a:cs typeface="+mn-cs"/>
+              </a:defRPr>
+            </a:lvl8pPr>
+            <a:lvl9pPr marL="3657600" algn="l" defTabSz="914400" rtl="0" eaLnBrk="1" latinLnBrk="0" hangingPunct="1">
+              <a:defRPr sz="1800" kern="1200">
+                <a:solidFill>
+                  <a:schemeClr val="tx1"/>
+                </a:solidFill>
+                <a:latin typeface="+mn-lt"/>
+                <a:ea typeface="+mn-ea"/>
+                <a:cs typeface="+mn-cs"/>
+              </a:defRPr>
+            </a:lvl9pPr>
+          </a:lstStyle>
+          <a:p>
+            <a:pPr algn="ctr"/>
+            <a:r>
+              <a:rPr lang="it-IT" sz="1800" b="1" noProof="0" dirty="0">
+                <a:solidFill>
+                  <a:schemeClr val="bg1"/>
+                </a:solidFill>
+                <a:latin typeface="Cambria" panose="02040503050406030204" pitchFamily="18" charset="0"/>
+                <a:ea typeface="Cambria" panose="02040503050406030204" pitchFamily="18" charset="0"/>
+              </a:rPr>
+              <a:t>9</a:t>
+            </a:r>
+          </a:p>
+        </p:txBody>
+      </p:sp>
+      <p:sp>
+        <p:nvSpPr>
+          <p:cNvPr id="6" name="Segnaposto contenuto 2">
+            <a:extLst>
+              <a:ext uri="{FF2B5EF4-FFF2-40B4-BE49-F238E27FC236}">
+                <a16:creationId xmlns:a16="http://schemas.microsoft.com/office/drawing/2014/main" id="{9084F79B-56AC-DB8F-675E-D31755F32CA6}"/>
+              </a:ext>
+            </a:extLst>
+          </p:cNvPr>
+          <p:cNvSpPr txBox="1">
+            <a:spLocks/>
+          </p:cNvSpPr>
+          <p:nvPr/>
+        </p:nvSpPr>
+        <p:spPr>
+          <a:xfrm>
+            <a:off x="838200" y="1515818"/>
+            <a:ext cx="10515600" cy="4559780"/>
+          </a:xfrm>
+          <a:prstGeom prst="rect">
+            <a:avLst/>
+          </a:prstGeom>
+        </p:spPr>
+        <p:txBody>
+          <a:bodyPr vert="horz" lIns="91440" tIns="45720" rIns="91440" bIns="45720" rtlCol="0">
+            <a:normAutofit/>
+          </a:bodyPr>
+          <a:lstStyle>
+            <a:lvl1pPr marL="228600" indent="-228600" algn="l" defTabSz="914400" rtl="0" eaLnBrk="1" latinLnBrk="0" hangingPunct="1">
+              <a:lnSpc>
+                <a:spcPct val="90000"/>
+              </a:lnSpc>
+              <a:spcBef>
+                <a:spcPts val="1000"/>
+              </a:spcBef>
+              <a:buFont typeface="Arial" panose="020B0604020202020204" pitchFamily="34" charset="0"/>
+              <a:buChar char="•"/>
+              <a:defRPr sz="2800" kern="1200">
+                <a:solidFill>
+                  <a:schemeClr val="tx1"/>
+                </a:solidFill>
+                <a:latin typeface="+mn-lt"/>
+                <a:ea typeface="+mn-ea"/>
+                <a:cs typeface="+mn-cs"/>
+              </a:defRPr>
+            </a:lvl1pPr>
+            <a:lvl2pPr marL="685800" indent="-228600" algn="l" defTabSz="914400" rtl="0" eaLnBrk="1" latinLnBrk="0" hangingPunct="1">
+              <a:lnSpc>
+                <a:spcPct val="90000"/>
+              </a:lnSpc>
+              <a:spcBef>
+                <a:spcPts val="500"/>
+              </a:spcBef>
+              <a:buFont typeface="Arial" panose="020B0604020202020204" pitchFamily="34" charset="0"/>
+              <a:buChar char="•"/>
+              <a:defRPr sz="2400" kern="1200">
+                <a:solidFill>
+                  <a:schemeClr val="tx1"/>
+                </a:solidFill>
+                <a:latin typeface="+mn-lt"/>
+                <a:ea typeface="+mn-ea"/>
+                <a:cs typeface="+mn-cs"/>
+              </a:defRPr>
+            </a:lvl2pPr>
+            <a:lvl3pPr marL="1143000" indent="-228600" algn="l" defTabSz="914400" rtl="0" eaLnBrk="1" latinLnBrk="0" hangingPunct="1">
+              <a:lnSpc>
+                <a:spcPct val="90000"/>
+              </a:lnSpc>
+              <a:spcBef>
+                <a:spcPts val="500"/>
+              </a:spcBef>
+              <a:buFont typeface="Arial" panose="020B0604020202020204" pitchFamily="34" charset="0"/>
+              <a:buChar char="•"/>
+              <a:defRPr sz="2000" kern="1200">
+                <a:solidFill>
+                  <a:schemeClr val="tx1"/>
+                </a:solidFill>
+                <a:latin typeface="+mn-lt"/>
+                <a:ea typeface="+mn-ea"/>
+                <a:cs typeface="+mn-cs"/>
+              </a:defRPr>
+            </a:lvl3pPr>
+            <a:lvl4pPr marL="1600200" indent="-228600" algn="l" defTabSz="914400" rtl="0" eaLnBrk="1" latinLnBrk="0" hangingPunct="1">
+              <a:lnSpc>
+                <a:spcPct val="90000"/>
+              </a:lnSpc>
+              <a:spcBef>
+                <a:spcPts val="500"/>
+              </a:spcBef>
+              <a:buFont typeface="Arial" panose="020B0604020202020204" pitchFamily="34" charset="0"/>
+              <a:buChar char="•"/>
+              <a:defRPr sz="1800" kern="1200">
+                <a:solidFill>
+                  <a:schemeClr val="tx1"/>
+                </a:solidFill>
+                <a:latin typeface="+mn-lt"/>
+                <a:ea typeface="+mn-ea"/>
+                <a:cs typeface="+mn-cs"/>
+              </a:defRPr>
+            </a:lvl4pPr>
+            <a:lvl5pPr marL="2057400" indent="-228600" algn="l" defTabSz="914400" rtl="0" eaLnBrk="1" latinLnBrk="0" hangingPunct="1">
+              <a:lnSpc>
+                <a:spcPct val="90000"/>
+              </a:lnSpc>
+              <a:spcBef>
+                <a:spcPts val="500"/>
+              </a:spcBef>
+              <a:buFont typeface="Arial" panose="020B0604020202020204" pitchFamily="34" charset="0"/>
+              <a:buChar char="•"/>
+              <a:defRPr sz="1800" kern="1200">
+                <a:solidFill>
+                  <a:schemeClr val="tx1"/>
+                </a:solidFill>
+                <a:latin typeface="+mn-lt"/>
+                <a:ea typeface="+mn-ea"/>
+                <a:cs typeface="+mn-cs"/>
+              </a:defRPr>
+            </a:lvl5pPr>
+            <a:lvl6pPr marL="2514600" indent="-228600" algn="l" defTabSz="914400" rtl="0" eaLnBrk="1" latinLnBrk="0" hangingPunct="1">
+              <a:lnSpc>
+                <a:spcPct val="90000"/>
+              </a:lnSpc>
+              <a:spcBef>
+                <a:spcPts val="500"/>
+              </a:spcBef>
+              <a:buFont typeface="Arial" panose="020B0604020202020204" pitchFamily="34" charset="0"/>
+              <a:buChar char="•"/>
+              <a:defRPr sz="1800" kern="1200">
+                <a:solidFill>
+                  <a:schemeClr val="tx1"/>
+                </a:solidFill>
+                <a:latin typeface="+mn-lt"/>
+                <a:ea typeface="+mn-ea"/>
+                <a:cs typeface="+mn-cs"/>
+              </a:defRPr>
+            </a:lvl6pPr>
+            <a:lvl7pPr marL="2971800" indent="-228600" algn="l" defTabSz="914400" rtl="0" eaLnBrk="1" latinLnBrk="0" hangingPunct="1">
+              <a:lnSpc>
+                <a:spcPct val="90000"/>
+              </a:lnSpc>
+              <a:spcBef>
+                <a:spcPts val="500"/>
+              </a:spcBef>
+              <a:buFont typeface="Arial" panose="020B0604020202020204" pitchFamily="34" charset="0"/>
+              <a:buChar char="•"/>
+              <a:defRPr sz="1800" kern="1200">
+                <a:solidFill>
+                  <a:schemeClr val="tx1"/>
+                </a:solidFill>
+                <a:latin typeface="+mn-lt"/>
+                <a:ea typeface="+mn-ea"/>
+                <a:cs typeface="+mn-cs"/>
+              </a:defRPr>
+            </a:lvl7pPr>
+            <a:lvl8pPr marL="3429000" indent="-228600" algn="l" defTabSz="914400" rtl="0" eaLnBrk="1" latinLnBrk="0" hangingPunct="1">
+              <a:lnSpc>
+                <a:spcPct val="90000"/>
+              </a:lnSpc>
+              <a:spcBef>
+                <a:spcPts val="500"/>
+              </a:spcBef>
+              <a:buFont typeface="Arial" panose="020B0604020202020204" pitchFamily="34" charset="0"/>
+              <a:buChar char="•"/>
+              <a:defRPr sz="1800" kern="1200">
+                <a:solidFill>
+                  <a:schemeClr val="tx1"/>
+                </a:solidFill>
+                <a:latin typeface="+mn-lt"/>
+                <a:ea typeface="+mn-ea"/>
+                <a:cs typeface="+mn-cs"/>
+              </a:defRPr>
+            </a:lvl8pPr>
+            <a:lvl9pPr marL="3886200" indent="-228600" algn="l" defTabSz="914400" rtl="0" eaLnBrk="1" latinLnBrk="0" hangingPunct="1">
+              <a:lnSpc>
+                <a:spcPct val="90000"/>
+              </a:lnSpc>
+              <a:spcBef>
+                <a:spcPts val="500"/>
+              </a:spcBef>
+              <a:buFont typeface="Arial" panose="020B0604020202020204" pitchFamily="34" charset="0"/>
+              <a:buChar char="•"/>
+              <a:defRPr sz="1800" kern="1200">
+                <a:solidFill>
+                  <a:schemeClr val="tx1"/>
+                </a:solidFill>
+                <a:latin typeface="+mn-lt"/>
+                <a:ea typeface="+mn-ea"/>
+                <a:cs typeface="+mn-cs"/>
+              </a:defRPr>
+            </a:lvl9pPr>
+          </a:lstStyle>
+          <a:p>
+            <a:endParaRPr lang="it-IT" dirty="0">
+              <a:latin typeface="Cambria" panose="02040503050406030204" pitchFamily="18" charset="0"/>
+              <a:ea typeface="Cambria" panose="02040503050406030204" pitchFamily="18" charset="0"/>
+            </a:endParaRPr>
+          </a:p>
+          <a:p>
+            <a:r>
+              <a:rPr lang="it-IT" dirty="0">
+                <a:latin typeface="Cambria" panose="02040503050406030204" pitchFamily="18" charset="0"/>
+                <a:ea typeface="Cambria" panose="02040503050406030204" pitchFamily="18" charset="0"/>
+              </a:rPr>
+              <a:t>Metodo </a:t>
+            </a:r>
+            <a:r>
+              <a:rPr lang="it-IT" dirty="0" err="1">
+                <a:latin typeface="Cambria" panose="02040503050406030204" pitchFamily="18" charset="0"/>
+                <a:ea typeface="Cambria" panose="02040503050406030204" pitchFamily="18" charset="0"/>
+              </a:rPr>
+              <a:t>isPubblicazionPrestata</a:t>
+            </a:r>
+            <a:r>
+              <a:rPr lang="it-IT" dirty="0">
+                <a:latin typeface="Cambria" panose="02040503050406030204" pitchFamily="18" charset="0"/>
+                <a:ea typeface="Cambria" panose="02040503050406030204" pitchFamily="18" charset="0"/>
+              </a:rPr>
+              <a:t>(</a:t>
+            </a:r>
+            <a:r>
+              <a:rPr lang="it-IT" dirty="0" err="1">
+                <a:latin typeface="Cambria" panose="02040503050406030204" pitchFamily="18" charset="0"/>
+                <a:ea typeface="Cambria" panose="02040503050406030204" pitchFamily="18" charset="0"/>
+              </a:rPr>
+              <a:t>int</a:t>
+            </a:r>
+            <a:r>
+              <a:rPr lang="it-IT" dirty="0">
+                <a:latin typeface="Cambria" panose="02040503050406030204" pitchFamily="18" charset="0"/>
+                <a:ea typeface="Cambria" panose="02040503050406030204" pitchFamily="18" charset="0"/>
+              </a:rPr>
+              <a:t> codice) che verifica se la pubblicazione con codice passato come parametro è in prestito</a:t>
+            </a:r>
+          </a:p>
+          <a:p>
+            <a:r>
+              <a:rPr lang="it-IT" dirty="0">
+                <a:latin typeface="Cambria" panose="02040503050406030204" pitchFamily="18" charset="0"/>
+                <a:ea typeface="Cambria" panose="02040503050406030204" pitchFamily="18" charset="0"/>
+              </a:rPr>
+              <a:t>Metodo Prestito[] </a:t>
+            </a:r>
+            <a:r>
+              <a:rPr lang="it-IT" dirty="0" err="1">
+                <a:latin typeface="Cambria" panose="02040503050406030204" pitchFamily="18" charset="0"/>
+                <a:ea typeface="Cambria" panose="02040503050406030204" pitchFamily="18" charset="0"/>
+              </a:rPr>
+              <a:t>getPrestitiUtente</a:t>
+            </a:r>
+            <a:r>
+              <a:rPr lang="it-IT" dirty="0">
+                <a:latin typeface="Cambria" panose="02040503050406030204" pitchFamily="18" charset="0"/>
+                <a:ea typeface="Cambria" panose="02040503050406030204" pitchFamily="18" charset="0"/>
+              </a:rPr>
+              <a:t>(</a:t>
+            </a:r>
+            <a:r>
+              <a:rPr lang="it-IT" dirty="0" err="1">
+                <a:latin typeface="Cambria" panose="02040503050406030204" pitchFamily="18" charset="0"/>
+                <a:ea typeface="Cambria" panose="02040503050406030204" pitchFamily="18" charset="0"/>
+              </a:rPr>
+              <a:t>int</a:t>
+            </a:r>
+            <a:r>
+              <a:rPr lang="it-IT" dirty="0">
+                <a:latin typeface="Cambria" panose="02040503050406030204" pitchFamily="18" charset="0"/>
+                <a:ea typeface="Cambria" panose="02040503050406030204" pitchFamily="18" charset="0"/>
+              </a:rPr>
+              <a:t> </a:t>
+            </a:r>
+            <a:r>
+              <a:rPr lang="it-IT" dirty="0" err="1">
+                <a:latin typeface="Cambria" panose="02040503050406030204" pitchFamily="18" charset="0"/>
+                <a:ea typeface="Cambria" panose="02040503050406030204" pitchFamily="18" charset="0"/>
+              </a:rPr>
+              <a:t>idUtente</a:t>
+            </a:r>
+            <a:r>
+              <a:rPr lang="it-IT" dirty="0">
+                <a:latin typeface="Cambria" panose="02040503050406030204" pitchFamily="18" charset="0"/>
+                <a:ea typeface="Cambria" panose="02040503050406030204" pitchFamily="18" charset="0"/>
+              </a:rPr>
+              <a:t>) che ritorna un array contenente tutti i prestiti associati all’utente specificato</a:t>
+            </a:r>
+          </a:p>
+          <a:p>
+            <a:r>
+              <a:rPr lang="it-IT" dirty="0">
+                <a:latin typeface="Cambria" panose="02040503050406030204" pitchFamily="18" charset="0"/>
+                <a:ea typeface="Cambria" panose="02040503050406030204" pitchFamily="18" charset="0"/>
+              </a:rPr>
+              <a:t>Metodo </a:t>
+            </a:r>
+            <a:r>
+              <a:rPr lang="it-IT" dirty="0" err="1">
+                <a:latin typeface="Cambria" panose="02040503050406030204" pitchFamily="18" charset="0"/>
+                <a:ea typeface="Cambria" panose="02040503050406030204" pitchFamily="18" charset="0"/>
+              </a:rPr>
+              <a:t>getNumeroPrestitiAttuali</a:t>
+            </a:r>
+            <a:r>
+              <a:rPr lang="it-IT" dirty="0">
+                <a:latin typeface="Cambria" panose="02040503050406030204" pitchFamily="18" charset="0"/>
+                <a:ea typeface="Cambria" panose="02040503050406030204" pitchFamily="18" charset="0"/>
+              </a:rPr>
+              <a:t>() che ritorna i prestiti attualmente registrati</a:t>
+            </a:r>
+          </a:p>
+        </p:txBody>
+      </p:sp>
+    </p:spTree>
+    <p:extLst>
+      <p:ext uri="{BB962C8B-B14F-4D97-AF65-F5344CB8AC3E}">
+        <p14:creationId xmlns:p14="http://schemas.microsoft.com/office/powerpoint/2010/main" val="247524872"/>
       </p:ext>
     </p:extLst>
   </p:cSld>
